--- a/public/lessons/year-6-maths/spring/week-20/assess-learning-and-plan-next-steps/teaching-powerpoint-v1.pptx
+++ b/public/lessons/year-6-maths/spring/week-20/assess-learning-and-plan-next-steps/teaching-powerpoint-v1.pptx
@@ -2,24 +2,24 @@
 <file path=ppt/presentation.xml><?xml version="1.0" encoding="utf-8"?>
 <p:presentation xmlns:p="http://schemas.openxmlformats.org/presentationml/2006/main">
   <p:sldMasterIdLst>
-    <p:sldMasterId xmlns:r="http://schemas.openxmlformats.org/officeDocument/2006/relationships" id="2147483648" r:id="Re1d7c4186ee04b99"/>
+    <p:sldMasterId xmlns:r="http://schemas.openxmlformats.org/officeDocument/2006/relationships" id="2147483648" r:id="Rc2fa25aeaf2d472f"/>
   </p:sldMasterIdLst>
   <p:notesMasterIdLst>
-    <p:notesMasterId xmlns:r="http://schemas.openxmlformats.org/officeDocument/2006/relationships" r:id="R0ffbe13c27fe448c"/>
+    <p:notesMasterId xmlns:r="http://schemas.openxmlformats.org/officeDocument/2006/relationships" r:id="Rc6b8fd3f46f242ae"/>
   </p:notesMasterIdLst>
   <p:sldIdLst>
-    <p:sldId xmlns:r="http://schemas.openxmlformats.org/officeDocument/2006/relationships" id="256" r:id="Rc9cbd1f35b564197"/>
-    <p:sldId xmlns:r="http://schemas.openxmlformats.org/officeDocument/2006/relationships" id="257" r:id="R5de6f5ef0b8a452c"/>
-    <p:sldId xmlns:r="http://schemas.openxmlformats.org/officeDocument/2006/relationships" id="258" r:id="R6ce369083eba4ac3"/>
-    <p:sldId xmlns:r="http://schemas.openxmlformats.org/officeDocument/2006/relationships" id="259" r:id="R18458d9a229746e9"/>
-    <p:sldId xmlns:r="http://schemas.openxmlformats.org/officeDocument/2006/relationships" id="260" r:id="R00d83ca5ad734dfe"/>
-    <p:sldId xmlns:r="http://schemas.openxmlformats.org/officeDocument/2006/relationships" id="261" r:id="R4a02c835f05f4ad0"/>
-    <p:sldId xmlns:r="http://schemas.openxmlformats.org/officeDocument/2006/relationships" id="262" r:id="R0af1dc1d10ec407d"/>
-    <p:sldId xmlns:r="http://schemas.openxmlformats.org/officeDocument/2006/relationships" id="263" r:id="R8c2a5ce94f274ce9"/>
-    <p:sldId xmlns:r="http://schemas.openxmlformats.org/officeDocument/2006/relationships" id="264" r:id="R3f2e914136674e8e"/>
-    <p:sldId xmlns:r="http://schemas.openxmlformats.org/officeDocument/2006/relationships" id="265" r:id="R0dc055fde1854c78"/>
-    <p:sldId xmlns:r="http://schemas.openxmlformats.org/officeDocument/2006/relationships" id="266" r:id="R865f3a0e55c54596"/>
-    <p:sldId xmlns:r="http://schemas.openxmlformats.org/officeDocument/2006/relationships" id="267" r:id="R4de93403b6ec449e"/>
+    <p:sldId xmlns:r="http://schemas.openxmlformats.org/officeDocument/2006/relationships" id="256" r:id="R0641d4b84f9349b0"/>
+    <p:sldId xmlns:r="http://schemas.openxmlformats.org/officeDocument/2006/relationships" id="257" r:id="R510e8ec9fe7346d0"/>
+    <p:sldId xmlns:r="http://schemas.openxmlformats.org/officeDocument/2006/relationships" id="258" r:id="R30b41e3e123d4293"/>
+    <p:sldId xmlns:r="http://schemas.openxmlformats.org/officeDocument/2006/relationships" id="259" r:id="R94429ceb16ba4a4a"/>
+    <p:sldId xmlns:r="http://schemas.openxmlformats.org/officeDocument/2006/relationships" id="260" r:id="Rc49b5b488a89449d"/>
+    <p:sldId xmlns:r="http://schemas.openxmlformats.org/officeDocument/2006/relationships" id="261" r:id="Ra7330dad60fe4c0a"/>
+    <p:sldId xmlns:r="http://schemas.openxmlformats.org/officeDocument/2006/relationships" id="262" r:id="R0f9a127ebf9243b1"/>
+    <p:sldId xmlns:r="http://schemas.openxmlformats.org/officeDocument/2006/relationships" id="263" r:id="Rfa2a1832326540ec"/>
+    <p:sldId xmlns:r="http://schemas.openxmlformats.org/officeDocument/2006/relationships" id="264" r:id="R1f6514771cee4641"/>
+    <p:sldId xmlns:r="http://schemas.openxmlformats.org/officeDocument/2006/relationships" id="265" r:id="Rbbba193573f34902"/>
+    <p:sldId xmlns:r="http://schemas.openxmlformats.org/officeDocument/2006/relationships" id="266" r:id="R96f4c0d902d74964"/>
+    <p:sldId xmlns:r="http://schemas.openxmlformats.org/officeDocument/2006/relationships" id="267" r:id="R8a06e454d8ae4f1f"/>
   </p:sldIdLst>
   <p:sldSz cx="12192000" cy="6858000"/>
   <p:notesSz cx="6858000" cy="9144000"/>
@@ -873,7 +873,7 @@
           <a:lstStyle xmlns:a="http://schemas.openxmlformats.org/drawingml/2006/main"/>
           <a:p xmlns:a="http://schemas.openxmlformats.org/drawingml/2006/main">
             <a:r>
-              <a:t>I do. Reveal the question, setup and each calculation stage one click at a time. Pupils watch before copying. Model answer: 7/10, 0.72, 73%.</a:t>
+              <a:t>I do. Reveal the question, then reveal each mathematical change one click at a time. Point to the numbers and operation that changed before moving to the next line. Final answer: 7/10, 0.72, 73%.</a:t>
             </a:r>
           </a:p>
         </p:txBody>
@@ -1291,7 +1291,7 @@
   </p:cSld>
   <p:clrMap bg1="lt1" tx1="dk1" bg2="lt2" tx2="dk2" accent1="accent1" accent2="accent2" accent3="accent3" accent4="accent4" accent5="accent5" accent6="accent6" hlink="hlink" folHlink="folHlink"/>
   <p:sldLayoutIdLst>
-    <p:sldLayoutId xmlns:r="http://schemas.openxmlformats.org/officeDocument/2006/relationships" id="2147483649" r:id="R3d257763ef0c4e52"/>
+    <p:sldLayoutId xmlns:r="http://schemas.openxmlformats.org/officeDocument/2006/relationships" id="2147483649" r:id="Rb5fcc52c0d054ca5"/>
   </p:sldLayoutIdLst>
   <p:txStyles>
     <p:titleStyle>
@@ -1842,7 +1842,7 @@
           <p:cNvPr id="12" name="">
             <a:extLst xmlns:a="http://schemas.openxmlformats.org/drawingml/2006/main">
               <a:ext uri="{FF2B5EF4-FFF2-40B4-BE49-F238E27FC236}">
-                <a16:creationId xmlns:a16="http://schemas.microsoft.com/office/drawing/2014/main" id="{31415E41-AF6C-450F-B3B8-D0FDE7DB4EC5}"/>
+                <a16:creationId xmlns:a16="http://schemas.microsoft.com/office/drawing/2014/main" id="{4BC533C2-784E-4D1C-A112-975C76A3E0BE}"/>
               </a:ext>
             </a:extLst>
           </p:cNvPr>
@@ -1874,7 +1874,7 @@
           <p:cNvPr id="2" name="">
             <a:extLst xmlns:a="http://schemas.openxmlformats.org/drawingml/2006/main">
               <a:ext uri="{FF2B5EF4-FFF2-40B4-BE49-F238E27FC236}">
-                <a16:creationId xmlns:a16="http://schemas.microsoft.com/office/drawing/2014/main" id="{5A71B1AF-A59B-4A02-8238-4A1E4ACFBC17}"/>
+                <a16:creationId xmlns:a16="http://schemas.microsoft.com/office/drawing/2014/main" id="{1604EFA8-8293-4F7D-BD90-E4FE1FB09098}"/>
               </a:ext>
             </a:extLst>
           </p:cNvPr>
@@ -1931,7 +1931,7 @@
           <p:cNvPr id="3" name="">
             <a:extLst xmlns:a="http://schemas.openxmlformats.org/drawingml/2006/main">
               <a:ext uri="{FF2B5EF4-FFF2-40B4-BE49-F238E27FC236}">
-                <a16:creationId xmlns:a16="http://schemas.microsoft.com/office/drawing/2014/main" id="{74D21B91-4086-4A30-8C83-D3D8BBBF61AD}"/>
+                <a16:creationId xmlns:a16="http://schemas.microsoft.com/office/drawing/2014/main" id="{8B62CEBE-785E-4820-B812-31A768434804}"/>
               </a:ext>
             </a:extLst>
           </p:cNvPr>
@@ -1965,7 +1965,7 @@
           <p:cNvPr id="4" name="">
             <a:extLst xmlns:a="http://schemas.openxmlformats.org/drawingml/2006/main">
               <a:ext uri="{FF2B5EF4-FFF2-40B4-BE49-F238E27FC236}">
-                <a16:creationId xmlns:a16="http://schemas.microsoft.com/office/drawing/2014/main" id="{E04D1C2C-E8EB-449A-84E1-265A57EA77A0}"/>
+                <a16:creationId xmlns:a16="http://schemas.microsoft.com/office/drawing/2014/main" id="{CD1546CA-6D93-4B3F-9AB0-89CC1AFCD836}"/>
               </a:ext>
             </a:extLst>
           </p:cNvPr>
@@ -2022,7 +2022,7 @@
           <p:cNvPr id="5" name="">
             <a:extLst xmlns:a="http://schemas.openxmlformats.org/drawingml/2006/main">
               <a:ext uri="{FF2B5EF4-FFF2-40B4-BE49-F238E27FC236}">
-                <a16:creationId xmlns:a16="http://schemas.microsoft.com/office/drawing/2014/main" id="{D150FBD3-AD4E-4793-A3F6-CB750FF0D7CD}"/>
+                <a16:creationId xmlns:a16="http://schemas.microsoft.com/office/drawing/2014/main" id="{0E7DCF9A-11D5-453E-8BC4-ED0CFB190A7F}"/>
               </a:ext>
             </a:extLst>
           </p:cNvPr>
@@ -2079,7 +2079,7 @@
           <p:cNvPr id="6" name="">
             <a:extLst xmlns:a="http://schemas.openxmlformats.org/drawingml/2006/main">
               <a:ext uri="{FF2B5EF4-FFF2-40B4-BE49-F238E27FC236}">
-                <a16:creationId xmlns:a16="http://schemas.microsoft.com/office/drawing/2014/main" id="{83ED0049-94CB-422B-A8AB-E169E3CD5CFC}"/>
+                <a16:creationId xmlns:a16="http://schemas.microsoft.com/office/drawing/2014/main" id="{CF289FC5-D0A3-47E1-BFEA-41267EE28204}"/>
               </a:ext>
             </a:extLst>
           </p:cNvPr>
@@ -2113,7 +2113,7 @@
           <p:cNvPr id="7" name="">
             <a:extLst xmlns:a="http://schemas.openxmlformats.org/drawingml/2006/main">
               <a:ext uri="{FF2B5EF4-FFF2-40B4-BE49-F238E27FC236}">
-                <a16:creationId xmlns:a16="http://schemas.microsoft.com/office/drawing/2014/main" id="{F61D832E-83E1-4378-991C-C2C8354401ED}"/>
+                <a16:creationId xmlns:a16="http://schemas.microsoft.com/office/drawing/2014/main" id="{D32AF587-1962-451E-8372-61E4386C338D}"/>
               </a:ext>
             </a:extLst>
           </p:cNvPr>
@@ -2170,7 +2170,7 @@
           <p:cNvPr id="8" name="">
             <a:extLst xmlns:a="http://schemas.openxmlformats.org/drawingml/2006/main">
               <a:ext uri="{FF2B5EF4-FFF2-40B4-BE49-F238E27FC236}">
-                <a16:creationId xmlns:a16="http://schemas.microsoft.com/office/drawing/2014/main" id="{7F2D115C-5AD7-4B9E-BDAD-996FD02E5670}"/>
+                <a16:creationId xmlns:a16="http://schemas.microsoft.com/office/drawing/2014/main" id="{F70D5156-E107-475D-BCD5-0AFD1B66B56A}"/>
               </a:ext>
             </a:extLst>
           </p:cNvPr>
@@ -2227,7 +2227,7 @@
           <p:cNvPr id="9" name="">
             <a:extLst xmlns:a="http://schemas.openxmlformats.org/drawingml/2006/main">
               <a:ext uri="{FF2B5EF4-FFF2-40B4-BE49-F238E27FC236}">
-                <a16:creationId xmlns:a16="http://schemas.microsoft.com/office/drawing/2014/main" id="{DDBD99F2-461D-437A-A7BB-0DBBA4BC7183}"/>
+                <a16:creationId xmlns:a16="http://schemas.microsoft.com/office/drawing/2014/main" id="{BB870079-495A-4206-BF35-BE1C9DB5D0B6}"/>
               </a:ext>
             </a:extLst>
           </p:cNvPr>
@@ -2284,7 +2284,7 @@
           <p:cNvPr id="10" name="">
             <a:extLst xmlns:a="http://schemas.openxmlformats.org/drawingml/2006/main">
               <a:ext uri="{FF2B5EF4-FFF2-40B4-BE49-F238E27FC236}">
-                <a16:creationId xmlns:a16="http://schemas.microsoft.com/office/drawing/2014/main" id="{D6D6A836-8163-4D23-82E5-181FF07EA2C7}"/>
+                <a16:creationId xmlns:a16="http://schemas.microsoft.com/office/drawing/2014/main" id="{8A93E930-D381-46CB-A9F1-8F27C342E4BF}"/>
               </a:ext>
             </a:extLst>
           </p:cNvPr>
@@ -2341,7 +2341,7 @@
           <p:cNvPr id="11" name="">
             <a:extLst xmlns:a="http://schemas.openxmlformats.org/drawingml/2006/main">
               <a:ext uri="{FF2B5EF4-FFF2-40B4-BE49-F238E27FC236}">
-                <a16:creationId xmlns:a16="http://schemas.microsoft.com/office/drawing/2014/main" id="{D4E4C34C-DE05-4AE7-99A3-FEFFF6174531}"/>
+                <a16:creationId xmlns:a16="http://schemas.microsoft.com/office/drawing/2014/main" id="{4C96A5DA-07D9-4854-8B1E-9E5AFD7CBFC4}"/>
               </a:ext>
             </a:extLst>
           </p:cNvPr>
@@ -2396,7 +2396,7 @@
     </p:spTree>
     <p:extLst>
       <p:ext uri="{BB962C8B-B14F-4D97-AF65-F5344CB8AC3E}">
-        <p14:creationId xmlns:p14="http://schemas.microsoft.com/office/powerpoint/2010/main" val="1361180344"/>
+        <p14:creationId xmlns:p14="http://schemas.microsoft.com/office/powerpoint/2010/main" val="1791629563"/>
       </p:ext>
     </p:extLst>
   </p:cSld>
@@ -2427,7 +2427,7 @@
           <p:cNvPr id="14" name="">
             <a:extLst xmlns:a="http://schemas.openxmlformats.org/drawingml/2006/main">
               <a:ext uri="{FF2B5EF4-FFF2-40B4-BE49-F238E27FC236}">
-                <a16:creationId xmlns:a16="http://schemas.microsoft.com/office/drawing/2014/main" id="{C7698509-93E3-4F69-A51B-3C2B6695CF40}"/>
+                <a16:creationId xmlns:a16="http://schemas.microsoft.com/office/drawing/2014/main" id="{E0C013B1-C3C8-49A4-9C85-C7F31C7D899A}"/>
               </a:ext>
             </a:extLst>
           </p:cNvPr>
@@ -2459,7 +2459,7 @@
           <p:cNvPr id="2" name="">
             <a:extLst xmlns:a="http://schemas.openxmlformats.org/drawingml/2006/main">
               <a:ext uri="{FF2B5EF4-FFF2-40B4-BE49-F238E27FC236}">
-                <a16:creationId xmlns:a16="http://schemas.microsoft.com/office/drawing/2014/main" id="{E4920440-FFC2-46C9-8259-221F9E6816F9}"/>
+                <a16:creationId xmlns:a16="http://schemas.microsoft.com/office/drawing/2014/main" id="{488DF54E-B99E-41EC-9246-252E24314CC9}"/>
               </a:ext>
             </a:extLst>
           </p:cNvPr>
@@ -2516,7 +2516,7 @@
           <p:cNvPr id="3" name="">
             <a:extLst xmlns:a="http://schemas.openxmlformats.org/drawingml/2006/main">
               <a:ext uri="{FF2B5EF4-FFF2-40B4-BE49-F238E27FC236}">
-                <a16:creationId xmlns:a16="http://schemas.microsoft.com/office/drawing/2014/main" id="{DB140543-56D6-4168-994D-3DC2884DB23F}"/>
+                <a16:creationId xmlns:a16="http://schemas.microsoft.com/office/drawing/2014/main" id="{68F55D61-7F01-4E81-BA82-6AD9239D899F}"/>
               </a:ext>
             </a:extLst>
           </p:cNvPr>
@@ -2548,7 +2548,7 @@
           <p:cNvPr id="4" name="">
             <a:extLst xmlns:a="http://schemas.openxmlformats.org/drawingml/2006/main">
               <a:ext uri="{FF2B5EF4-FFF2-40B4-BE49-F238E27FC236}">
-                <a16:creationId xmlns:a16="http://schemas.microsoft.com/office/drawing/2014/main" id="{60274322-823D-428F-B855-4444E67C5A92}"/>
+                <a16:creationId xmlns:a16="http://schemas.microsoft.com/office/drawing/2014/main" id="{0886629F-4356-477D-9100-1468ED795ECB}"/>
               </a:ext>
             </a:extLst>
           </p:cNvPr>
@@ -2605,7 +2605,7 @@
           <p:cNvPr id="5" name="">
             <a:extLst xmlns:a="http://schemas.openxmlformats.org/drawingml/2006/main">
               <a:ext uri="{FF2B5EF4-FFF2-40B4-BE49-F238E27FC236}">
-                <a16:creationId xmlns:a16="http://schemas.microsoft.com/office/drawing/2014/main" id="{0B5E97A8-3510-49F1-B1E6-10516AB145D5}"/>
+                <a16:creationId xmlns:a16="http://schemas.microsoft.com/office/drawing/2014/main" id="{156A66D1-EAD2-4090-9F8B-1C143ABE7255}"/>
               </a:ext>
             </a:extLst>
           </p:cNvPr>
@@ -2662,7 +2662,7 @@
           <p:cNvPr id="6" name="">
             <a:extLst xmlns:a="http://schemas.openxmlformats.org/drawingml/2006/main">
               <a:ext uri="{FF2B5EF4-FFF2-40B4-BE49-F238E27FC236}">
-                <a16:creationId xmlns:a16="http://schemas.microsoft.com/office/drawing/2014/main" id="{B8640C5B-F2E4-43E8-9552-24847E35C7BD}"/>
+                <a16:creationId xmlns:a16="http://schemas.microsoft.com/office/drawing/2014/main" id="{ED91ACCE-942B-427E-B9BF-61F0BFED3D99}"/>
               </a:ext>
             </a:extLst>
           </p:cNvPr>
@@ -2719,7 +2719,7 @@
           <p:cNvPr id="7" name="">
             <a:extLst xmlns:a="http://schemas.openxmlformats.org/drawingml/2006/main">
               <a:ext uri="{FF2B5EF4-FFF2-40B4-BE49-F238E27FC236}">
-                <a16:creationId xmlns:a16="http://schemas.microsoft.com/office/drawing/2014/main" id="{12F25A1C-085D-43C9-A6EE-F2B028C4DEAF}"/>
+                <a16:creationId xmlns:a16="http://schemas.microsoft.com/office/drawing/2014/main" id="{037967D4-9EF2-4DFA-B93F-9118C5864941}"/>
               </a:ext>
             </a:extLst>
           </p:cNvPr>
@@ -2751,7 +2751,7 @@
           <p:cNvPr id="8" name="">
             <a:extLst xmlns:a="http://schemas.openxmlformats.org/drawingml/2006/main">
               <a:ext uri="{FF2B5EF4-FFF2-40B4-BE49-F238E27FC236}">
-                <a16:creationId xmlns:a16="http://schemas.microsoft.com/office/drawing/2014/main" id="{4EB79704-0A7C-4E13-BE6E-10BF53256084}"/>
+                <a16:creationId xmlns:a16="http://schemas.microsoft.com/office/drawing/2014/main" id="{31390B63-12D2-4D83-8164-0F87170C4BDD}"/>
               </a:ext>
             </a:extLst>
           </p:cNvPr>
@@ -2808,7 +2808,7 @@
           <p:cNvPr id="9" name="">
             <a:extLst xmlns:a="http://schemas.openxmlformats.org/drawingml/2006/main">
               <a:ext uri="{FF2B5EF4-FFF2-40B4-BE49-F238E27FC236}">
-                <a16:creationId xmlns:a16="http://schemas.microsoft.com/office/drawing/2014/main" id="{1D5E3EBE-C93E-4D58-8587-E93D017C94DB}"/>
+                <a16:creationId xmlns:a16="http://schemas.microsoft.com/office/drawing/2014/main" id="{05DAC7CD-20BC-47D6-A24F-94C03CA9DF63}"/>
               </a:ext>
             </a:extLst>
           </p:cNvPr>
@@ -2865,7 +2865,7 @@
           <p:cNvPr id="10" name="">
             <a:extLst xmlns:a="http://schemas.openxmlformats.org/drawingml/2006/main">
               <a:ext uri="{FF2B5EF4-FFF2-40B4-BE49-F238E27FC236}">
-                <a16:creationId xmlns:a16="http://schemas.microsoft.com/office/drawing/2014/main" id="{A440E95D-F759-4E51-8E2F-A6C50D0A1763}"/>
+                <a16:creationId xmlns:a16="http://schemas.microsoft.com/office/drawing/2014/main" id="{36879043-0B85-4604-9EC8-4296489DF707}"/>
               </a:ext>
             </a:extLst>
           </p:cNvPr>
@@ -2922,7 +2922,7 @@
           <p:cNvPr id="11" name="">
             <a:extLst xmlns:a="http://schemas.openxmlformats.org/drawingml/2006/main">
               <a:ext uri="{FF2B5EF4-FFF2-40B4-BE49-F238E27FC236}">
-                <a16:creationId xmlns:a16="http://schemas.microsoft.com/office/drawing/2014/main" id="{C73425B5-714C-462A-A00E-A52293457C64}"/>
+                <a16:creationId xmlns:a16="http://schemas.microsoft.com/office/drawing/2014/main" id="{C1A48FBB-D5B7-44BB-AB94-F9F0036D3CA7}"/>
               </a:ext>
             </a:extLst>
           </p:cNvPr>
@@ -2979,7 +2979,7 @@
           <p:cNvPr id="12" name="">
             <a:extLst xmlns:a="http://schemas.openxmlformats.org/drawingml/2006/main">
               <a:ext uri="{FF2B5EF4-FFF2-40B4-BE49-F238E27FC236}">
-                <a16:creationId xmlns:a16="http://schemas.microsoft.com/office/drawing/2014/main" id="{BB807731-CB35-4187-8612-2A32E1E9E3ED}"/>
+                <a16:creationId xmlns:a16="http://schemas.microsoft.com/office/drawing/2014/main" id="{25EC7330-4A29-4986-9378-982F56B1877E}"/>
               </a:ext>
             </a:extLst>
           </p:cNvPr>
@@ -3036,7 +3036,7 @@
           <p:cNvPr id="13" name="">
             <a:extLst xmlns:a="http://schemas.openxmlformats.org/drawingml/2006/main">
               <a:ext uri="{FF2B5EF4-FFF2-40B4-BE49-F238E27FC236}">
-                <a16:creationId xmlns:a16="http://schemas.microsoft.com/office/drawing/2014/main" id="{0FEB26B9-EBCA-47D7-AB6F-B0ABED018991}"/>
+                <a16:creationId xmlns:a16="http://schemas.microsoft.com/office/drawing/2014/main" id="{F6A70DE1-238D-42FD-8B52-E75E48B8C17A}"/>
               </a:ext>
             </a:extLst>
           </p:cNvPr>
@@ -3091,7 +3091,7 @@
     </p:spTree>
     <p:extLst>
       <p:ext uri="{BB962C8B-B14F-4D97-AF65-F5344CB8AC3E}">
-        <p14:creationId xmlns:p14="http://schemas.microsoft.com/office/powerpoint/2010/main" val="1521821361"/>
+        <p14:creationId xmlns:p14="http://schemas.microsoft.com/office/powerpoint/2010/main" val="1561975112"/>
       </p:ext>
     </p:extLst>
   </p:cSld>
@@ -3292,7 +3292,7 @@
           <p:cNvPr id="19" name="">
             <a:extLst xmlns:a="http://schemas.openxmlformats.org/drawingml/2006/main">
               <a:ext uri="{FF2B5EF4-FFF2-40B4-BE49-F238E27FC236}">
-                <a16:creationId xmlns:a16="http://schemas.microsoft.com/office/drawing/2014/main" id="{59567FDC-8E47-4D43-817B-0A9038F9334D}"/>
+                <a16:creationId xmlns:a16="http://schemas.microsoft.com/office/drawing/2014/main" id="{E1E02763-A6AB-449E-A3FB-8139DC34C7F1}"/>
               </a:ext>
             </a:extLst>
           </p:cNvPr>
@@ -3324,7 +3324,7 @@
           <p:cNvPr id="2" name="">
             <a:extLst xmlns:a="http://schemas.openxmlformats.org/drawingml/2006/main">
               <a:ext uri="{FF2B5EF4-FFF2-40B4-BE49-F238E27FC236}">
-                <a16:creationId xmlns:a16="http://schemas.microsoft.com/office/drawing/2014/main" id="{6553DD8D-46BB-4146-B8C5-469FD3C82835}"/>
+                <a16:creationId xmlns:a16="http://schemas.microsoft.com/office/drawing/2014/main" id="{6E02F21D-9F39-463B-8965-C02C57766962}"/>
               </a:ext>
             </a:extLst>
           </p:cNvPr>
@@ -3381,7 +3381,7 @@
           <p:cNvPr id="3" name="">
             <a:extLst xmlns:a="http://schemas.openxmlformats.org/drawingml/2006/main">
               <a:ext uri="{FF2B5EF4-FFF2-40B4-BE49-F238E27FC236}">
-                <a16:creationId xmlns:a16="http://schemas.microsoft.com/office/drawing/2014/main" id="{83355F0C-9543-40E3-9184-620B09940A5A}"/>
+                <a16:creationId xmlns:a16="http://schemas.microsoft.com/office/drawing/2014/main" id="{7CC56EB6-6F59-4F4C-B073-0DA2CEEAC316}"/>
               </a:ext>
             </a:extLst>
           </p:cNvPr>
@@ -3413,7 +3413,7 @@
           <p:cNvPr id="4" name="">
             <a:extLst xmlns:a="http://schemas.openxmlformats.org/drawingml/2006/main">
               <a:ext uri="{FF2B5EF4-FFF2-40B4-BE49-F238E27FC236}">
-                <a16:creationId xmlns:a16="http://schemas.microsoft.com/office/drawing/2014/main" id="{AAFAFA79-B470-45B3-B887-30C492AA1E55}"/>
+                <a16:creationId xmlns:a16="http://schemas.microsoft.com/office/drawing/2014/main" id="{BE46216E-6769-4278-827E-5A6A017969CD}"/>
               </a:ext>
             </a:extLst>
           </p:cNvPr>
@@ -3470,7 +3470,7 @@
           <p:cNvPr id="5" name="">
             <a:extLst xmlns:a="http://schemas.openxmlformats.org/drawingml/2006/main">
               <a:ext uri="{FF2B5EF4-FFF2-40B4-BE49-F238E27FC236}">
-                <a16:creationId xmlns:a16="http://schemas.microsoft.com/office/drawing/2014/main" id="{895F1967-FFAC-4093-BE22-1E616EDE7FEC}"/>
+                <a16:creationId xmlns:a16="http://schemas.microsoft.com/office/drawing/2014/main" id="{6DC736C9-BA53-4808-AA0E-CF4D0E425D37}"/>
               </a:ext>
             </a:extLst>
           </p:cNvPr>
@@ -3527,7 +3527,7 @@
           <p:cNvPr id="6" name="">
             <a:extLst xmlns:a="http://schemas.openxmlformats.org/drawingml/2006/main">
               <a:ext uri="{FF2B5EF4-FFF2-40B4-BE49-F238E27FC236}">
-                <a16:creationId xmlns:a16="http://schemas.microsoft.com/office/drawing/2014/main" id="{95D0B904-AF74-481D-8F59-51E6FEE11E8C}"/>
+                <a16:creationId xmlns:a16="http://schemas.microsoft.com/office/drawing/2014/main" id="{D62677CA-0547-4596-9F12-19CC5C637F67}"/>
               </a:ext>
             </a:extLst>
           </p:cNvPr>
@@ -3584,7 +3584,7 @@
           <p:cNvPr id="7" name="">
             <a:extLst xmlns:a="http://schemas.openxmlformats.org/drawingml/2006/main">
               <a:ext uri="{FF2B5EF4-FFF2-40B4-BE49-F238E27FC236}">
-                <a16:creationId xmlns:a16="http://schemas.microsoft.com/office/drawing/2014/main" id="{8E5DBA44-4202-4B4E-B093-01D3914B08F7}"/>
+                <a16:creationId xmlns:a16="http://schemas.microsoft.com/office/drawing/2014/main" id="{D7BC2868-5B57-4A1B-ABAE-AE91F5B74478}"/>
               </a:ext>
             </a:extLst>
           </p:cNvPr>
@@ -3616,7 +3616,7 @@
           <p:cNvPr id="8" name="">
             <a:extLst xmlns:a="http://schemas.openxmlformats.org/drawingml/2006/main">
               <a:ext uri="{FF2B5EF4-FFF2-40B4-BE49-F238E27FC236}">
-                <a16:creationId xmlns:a16="http://schemas.microsoft.com/office/drawing/2014/main" id="{5E3191EF-03B8-4707-9879-039AA12945C2}"/>
+                <a16:creationId xmlns:a16="http://schemas.microsoft.com/office/drawing/2014/main" id="{3D0FE70B-50A8-4ADE-B2DA-872D8FB6D6D4}"/>
               </a:ext>
             </a:extLst>
           </p:cNvPr>
@@ -3673,7 +3673,7 @@
           <p:cNvPr id="9" name="">
             <a:extLst xmlns:a="http://schemas.openxmlformats.org/drawingml/2006/main">
               <a:ext uri="{FF2B5EF4-FFF2-40B4-BE49-F238E27FC236}">
-                <a16:creationId xmlns:a16="http://schemas.microsoft.com/office/drawing/2014/main" id="{DD866A52-4729-4981-A238-DDD026AE3267}"/>
+                <a16:creationId xmlns:a16="http://schemas.microsoft.com/office/drawing/2014/main" id="{0CD719EA-5FED-40A0-B0B5-C35CB47424FA}"/>
               </a:ext>
             </a:extLst>
           </p:cNvPr>
@@ -3730,7 +3730,7 @@
           <p:cNvPr id="10" name="">
             <a:extLst xmlns:a="http://schemas.openxmlformats.org/drawingml/2006/main">
               <a:ext uri="{FF2B5EF4-FFF2-40B4-BE49-F238E27FC236}">
-                <a16:creationId xmlns:a16="http://schemas.microsoft.com/office/drawing/2014/main" id="{E637B69C-047C-45F5-9226-0F8E173640F4}"/>
+                <a16:creationId xmlns:a16="http://schemas.microsoft.com/office/drawing/2014/main" id="{B28D989E-01C3-4111-91EB-8ED18C443E21}"/>
               </a:ext>
             </a:extLst>
           </p:cNvPr>
@@ -3787,7 +3787,7 @@
           <p:cNvPr id="11" name="">
             <a:extLst xmlns:a="http://schemas.openxmlformats.org/drawingml/2006/main">
               <a:ext uri="{FF2B5EF4-FFF2-40B4-BE49-F238E27FC236}">
-                <a16:creationId xmlns:a16="http://schemas.microsoft.com/office/drawing/2014/main" id="{C90240A2-04EE-4FC8-B836-F9C35C001802}"/>
+                <a16:creationId xmlns:a16="http://schemas.microsoft.com/office/drawing/2014/main" id="{0D3EE6B7-97A1-47A4-B839-18A6E1126B04}"/>
               </a:ext>
             </a:extLst>
           </p:cNvPr>
@@ -3821,7 +3821,7 @@
           <p:cNvPr id="12" name="">
             <a:extLst xmlns:a="http://schemas.openxmlformats.org/drawingml/2006/main">
               <a:ext uri="{FF2B5EF4-FFF2-40B4-BE49-F238E27FC236}">
-                <a16:creationId xmlns:a16="http://schemas.microsoft.com/office/drawing/2014/main" id="{4F233766-0484-472B-BE36-D27223CD4509}"/>
+                <a16:creationId xmlns:a16="http://schemas.microsoft.com/office/drawing/2014/main" id="{2ECAD4A4-F2D2-4EAB-9882-748EB2328CC4}"/>
               </a:ext>
             </a:extLst>
           </p:cNvPr>
@@ -3878,7 +3878,7 @@
           <p:cNvPr id="13" name="">
             <a:extLst xmlns:a="http://schemas.openxmlformats.org/drawingml/2006/main">
               <a:ext uri="{FF2B5EF4-FFF2-40B4-BE49-F238E27FC236}">
-                <a16:creationId xmlns:a16="http://schemas.microsoft.com/office/drawing/2014/main" id="{353676A7-0336-489B-8CD9-ABF627B00D54}"/>
+                <a16:creationId xmlns:a16="http://schemas.microsoft.com/office/drawing/2014/main" id="{E0FBAB2E-6B11-40A2-A089-8DF600F6C23A}"/>
               </a:ext>
             </a:extLst>
           </p:cNvPr>
@@ -3935,7 +3935,7 @@
           <p:cNvPr id="14" name="">
             <a:extLst xmlns:a="http://schemas.openxmlformats.org/drawingml/2006/main">
               <a:ext uri="{FF2B5EF4-FFF2-40B4-BE49-F238E27FC236}">
-                <a16:creationId xmlns:a16="http://schemas.microsoft.com/office/drawing/2014/main" id="{815C145E-DF6F-4652-A7E6-7E08BB69767F}"/>
+                <a16:creationId xmlns:a16="http://schemas.microsoft.com/office/drawing/2014/main" id="{FB23BA9C-6E93-4BB3-94F6-8ECBB8E654F9}"/>
               </a:ext>
             </a:extLst>
           </p:cNvPr>
@@ -3992,7 +3992,7 @@
           <p:cNvPr id="15" name="">
             <a:extLst xmlns:a="http://schemas.openxmlformats.org/drawingml/2006/main">
               <a:ext uri="{FF2B5EF4-FFF2-40B4-BE49-F238E27FC236}">
-                <a16:creationId xmlns:a16="http://schemas.microsoft.com/office/drawing/2014/main" id="{88C7BC8F-A6D8-425F-98CD-842F1CC2F575}"/>
+                <a16:creationId xmlns:a16="http://schemas.microsoft.com/office/drawing/2014/main" id="{46E7EB67-7A45-4CF2-90C8-162932B1D0DA}"/>
               </a:ext>
             </a:extLst>
           </p:cNvPr>
@@ -4026,7 +4026,7 @@
           <p:cNvPr id="16" name="">
             <a:extLst xmlns:a="http://schemas.openxmlformats.org/drawingml/2006/main">
               <a:ext uri="{FF2B5EF4-FFF2-40B4-BE49-F238E27FC236}">
-                <a16:creationId xmlns:a16="http://schemas.microsoft.com/office/drawing/2014/main" id="{1256C58B-0A05-4CD3-BA2B-0AB19C91BF90}"/>
+                <a16:creationId xmlns:a16="http://schemas.microsoft.com/office/drawing/2014/main" id="{6FDDBC5D-CD69-411B-BE76-31DF5FDC67E9}"/>
               </a:ext>
             </a:extLst>
           </p:cNvPr>
@@ -4083,7 +4083,7 @@
           <p:cNvPr id="17" name="">
             <a:extLst xmlns:a="http://schemas.openxmlformats.org/drawingml/2006/main">
               <a:ext uri="{FF2B5EF4-FFF2-40B4-BE49-F238E27FC236}">
-                <a16:creationId xmlns:a16="http://schemas.microsoft.com/office/drawing/2014/main" id="{DDFED062-3E13-4AD6-B657-EAEA1D4C4F31}"/>
+                <a16:creationId xmlns:a16="http://schemas.microsoft.com/office/drawing/2014/main" id="{934E2B12-F7BD-4278-A25B-CF15D40F885F}"/>
               </a:ext>
             </a:extLst>
           </p:cNvPr>
@@ -4140,7 +4140,7 @@
           <p:cNvPr id="18" name="">
             <a:extLst xmlns:a="http://schemas.openxmlformats.org/drawingml/2006/main">
               <a:ext uri="{FF2B5EF4-FFF2-40B4-BE49-F238E27FC236}">
-                <a16:creationId xmlns:a16="http://schemas.microsoft.com/office/drawing/2014/main" id="{F0EE8A96-437F-439E-8A65-2140E5A3CDBA}"/>
+                <a16:creationId xmlns:a16="http://schemas.microsoft.com/office/drawing/2014/main" id="{64B0ECC2-CA7F-4E6D-8291-185B8A7C711A}"/>
               </a:ext>
             </a:extLst>
           </p:cNvPr>
@@ -4195,7 +4195,7 @@
     </p:spTree>
     <p:extLst>
       <p:ext uri="{BB962C8B-B14F-4D97-AF65-F5344CB8AC3E}">
-        <p14:creationId xmlns:p14="http://schemas.microsoft.com/office/powerpoint/2010/main" val="1913919220"/>
+        <p14:creationId xmlns:p14="http://schemas.microsoft.com/office/powerpoint/2010/main" val="530767292"/>
       </p:ext>
     </p:extLst>
   </p:cSld>
@@ -4350,7 +4350,7 @@
           <p:cNvPr id="23" name="">
             <a:extLst xmlns:a="http://schemas.openxmlformats.org/drawingml/2006/main">
               <a:ext uri="{FF2B5EF4-FFF2-40B4-BE49-F238E27FC236}">
-                <a16:creationId xmlns:a16="http://schemas.microsoft.com/office/drawing/2014/main" id="{06F6CA16-08A4-4CD5-A157-5FB4885316B7}"/>
+                <a16:creationId xmlns:a16="http://schemas.microsoft.com/office/drawing/2014/main" id="{F7107981-F5BC-436A-9848-FDF4E4AC9996}"/>
               </a:ext>
             </a:extLst>
           </p:cNvPr>
@@ -4382,7 +4382,7 @@
           <p:cNvPr id="2" name="">
             <a:extLst xmlns:a="http://schemas.openxmlformats.org/drawingml/2006/main">
               <a:ext uri="{FF2B5EF4-FFF2-40B4-BE49-F238E27FC236}">
-                <a16:creationId xmlns:a16="http://schemas.microsoft.com/office/drawing/2014/main" id="{83764D42-E41B-407B-8BFC-A28D2F1090FB}"/>
+                <a16:creationId xmlns:a16="http://schemas.microsoft.com/office/drawing/2014/main" id="{E560A77B-336A-4612-BD79-EFBDBE9397A5}"/>
               </a:ext>
             </a:extLst>
           </p:cNvPr>
@@ -4439,7 +4439,7 @@
           <p:cNvPr id="3" name="">
             <a:extLst xmlns:a="http://schemas.openxmlformats.org/drawingml/2006/main">
               <a:ext uri="{FF2B5EF4-FFF2-40B4-BE49-F238E27FC236}">
-                <a16:creationId xmlns:a16="http://schemas.microsoft.com/office/drawing/2014/main" id="{62BAD670-28A1-4F92-8A18-BACB6760E1A1}"/>
+                <a16:creationId xmlns:a16="http://schemas.microsoft.com/office/drawing/2014/main" id="{8470E7D3-7C28-40B1-856E-1D379CE424C5}"/>
               </a:ext>
             </a:extLst>
           </p:cNvPr>
@@ -4471,7 +4471,7 @@
           <p:cNvPr id="4" name="">
             <a:extLst xmlns:a="http://schemas.openxmlformats.org/drawingml/2006/main">
               <a:ext uri="{FF2B5EF4-FFF2-40B4-BE49-F238E27FC236}">
-                <a16:creationId xmlns:a16="http://schemas.microsoft.com/office/drawing/2014/main" id="{B2A63A3D-4FE3-4AE9-AF0B-8FAB68C78133}"/>
+                <a16:creationId xmlns:a16="http://schemas.microsoft.com/office/drawing/2014/main" id="{45E34E47-53D5-464F-B380-439A6139F9B8}"/>
               </a:ext>
             </a:extLst>
           </p:cNvPr>
@@ -4528,7 +4528,7 @@
           <p:cNvPr id="5" name="">
             <a:extLst xmlns:a="http://schemas.openxmlformats.org/drawingml/2006/main">
               <a:ext uri="{FF2B5EF4-FFF2-40B4-BE49-F238E27FC236}">
-                <a16:creationId xmlns:a16="http://schemas.microsoft.com/office/drawing/2014/main" id="{69FD40AB-29F2-4533-8CEC-701017347B54}"/>
+                <a16:creationId xmlns:a16="http://schemas.microsoft.com/office/drawing/2014/main" id="{7CD4D96D-FE9F-42DF-913C-2E25408B31F9}"/>
               </a:ext>
             </a:extLst>
           </p:cNvPr>
@@ -4585,7 +4585,7 @@
           <p:cNvPr id="6" name="">
             <a:extLst xmlns:a="http://schemas.openxmlformats.org/drawingml/2006/main">
               <a:ext uri="{FF2B5EF4-FFF2-40B4-BE49-F238E27FC236}">
-                <a16:creationId xmlns:a16="http://schemas.microsoft.com/office/drawing/2014/main" id="{3B9BBB76-0862-4C26-8E2D-75588A290FC0}"/>
+                <a16:creationId xmlns:a16="http://schemas.microsoft.com/office/drawing/2014/main" id="{98DEC257-E2EE-4F25-9513-F8D65FDC354C}"/>
               </a:ext>
             </a:extLst>
           </p:cNvPr>
@@ -4642,7 +4642,7 @@
           <p:cNvPr id="7" name="">
             <a:extLst xmlns:a="http://schemas.openxmlformats.org/drawingml/2006/main">
               <a:ext uri="{FF2B5EF4-FFF2-40B4-BE49-F238E27FC236}">
-                <a16:creationId xmlns:a16="http://schemas.microsoft.com/office/drawing/2014/main" id="{9FF2EEA1-6523-45AC-98C1-764DF10D993E}"/>
+                <a16:creationId xmlns:a16="http://schemas.microsoft.com/office/drawing/2014/main" id="{BC256A36-8E2A-49CE-BA94-A0ED08AA9991}"/>
               </a:ext>
             </a:extLst>
           </p:cNvPr>
@@ -4674,7 +4674,7 @@
           <p:cNvPr id="8" name="">
             <a:extLst xmlns:a="http://schemas.openxmlformats.org/drawingml/2006/main">
               <a:ext uri="{FF2B5EF4-FFF2-40B4-BE49-F238E27FC236}">
-                <a16:creationId xmlns:a16="http://schemas.microsoft.com/office/drawing/2014/main" id="{898DDAF7-D61B-48C9-B58F-26BC67EC4B68}"/>
+                <a16:creationId xmlns:a16="http://schemas.microsoft.com/office/drawing/2014/main" id="{B55F0480-76A8-4D79-B430-0FFE6C1C5BF4}"/>
               </a:ext>
             </a:extLst>
           </p:cNvPr>
@@ -4731,7 +4731,7 @@
           <p:cNvPr id="9" name="">
             <a:extLst xmlns:a="http://schemas.openxmlformats.org/drawingml/2006/main">
               <a:ext uri="{FF2B5EF4-FFF2-40B4-BE49-F238E27FC236}">
-                <a16:creationId xmlns:a16="http://schemas.microsoft.com/office/drawing/2014/main" id="{BCEFAE78-E609-4571-AC04-9E9E4188982A}"/>
+                <a16:creationId xmlns:a16="http://schemas.microsoft.com/office/drawing/2014/main" id="{1D50611C-4C0B-4257-BE90-BECD1BFA647C}"/>
               </a:ext>
             </a:extLst>
           </p:cNvPr>
@@ -4788,7 +4788,7 @@
           <p:cNvPr id="10" name="">
             <a:extLst xmlns:a="http://schemas.openxmlformats.org/drawingml/2006/main">
               <a:ext uri="{FF2B5EF4-FFF2-40B4-BE49-F238E27FC236}">
-                <a16:creationId xmlns:a16="http://schemas.microsoft.com/office/drawing/2014/main" id="{3550E03B-E2ED-4A49-AC10-B54BDE63ED04}"/>
+                <a16:creationId xmlns:a16="http://schemas.microsoft.com/office/drawing/2014/main" id="{4078F1C4-07C5-4686-AD00-BF405C81BEA7}"/>
               </a:ext>
             </a:extLst>
           </p:cNvPr>
@@ -4822,7 +4822,7 @@
           <p:cNvPr id="11" name="">
             <a:extLst xmlns:a="http://schemas.openxmlformats.org/drawingml/2006/main">
               <a:ext uri="{FF2B5EF4-FFF2-40B4-BE49-F238E27FC236}">
-                <a16:creationId xmlns:a16="http://schemas.microsoft.com/office/drawing/2014/main" id="{9B394977-0A39-4F30-B6E9-4D770EDA0E88}"/>
+                <a16:creationId xmlns:a16="http://schemas.microsoft.com/office/drawing/2014/main" id="{30E8434E-3234-487A-B0C1-8DF2EB976724}"/>
               </a:ext>
             </a:extLst>
           </p:cNvPr>
@@ -4854,7 +4854,7 @@
           <p:cNvPr id="12" name="">
             <a:extLst xmlns:a="http://schemas.openxmlformats.org/drawingml/2006/main">
               <a:ext uri="{FF2B5EF4-FFF2-40B4-BE49-F238E27FC236}">
-                <a16:creationId xmlns:a16="http://schemas.microsoft.com/office/drawing/2014/main" id="{2593B639-B3AF-4BC6-9E90-A777615968C3}"/>
+                <a16:creationId xmlns:a16="http://schemas.microsoft.com/office/drawing/2014/main" id="{909658A0-1C7D-433B-9817-DE3BB1D8B225}"/>
               </a:ext>
             </a:extLst>
           </p:cNvPr>
@@ -4911,7 +4911,7 @@
           <p:cNvPr id="13" name="">
             <a:extLst xmlns:a="http://schemas.openxmlformats.org/drawingml/2006/main">
               <a:ext uri="{FF2B5EF4-FFF2-40B4-BE49-F238E27FC236}">
-                <a16:creationId xmlns:a16="http://schemas.microsoft.com/office/drawing/2014/main" id="{1803E29F-85AD-4F91-AD1C-29483D32EE84}"/>
+                <a16:creationId xmlns:a16="http://schemas.microsoft.com/office/drawing/2014/main" id="{6319794F-2D93-43A1-8F3D-6281398EF6EE}"/>
               </a:ext>
             </a:extLst>
           </p:cNvPr>
@@ -4968,7 +4968,7 @@
           <p:cNvPr id="14" name="">
             <a:extLst xmlns:a="http://schemas.openxmlformats.org/drawingml/2006/main">
               <a:ext uri="{FF2B5EF4-FFF2-40B4-BE49-F238E27FC236}">
-                <a16:creationId xmlns:a16="http://schemas.microsoft.com/office/drawing/2014/main" id="{E95F3777-72BD-4BDC-B629-5E1A9D369811}"/>
+                <a16:creationId xmlns:a16="http://schemas.microsoft.com/office/drawing/2014/main" id="{9241CE9A-8FAE-4646-8D9C-55420DEADA28}"/>
               </a:ext>
             </a:extLst>
           </p:cNvPr>
@@ -5002,7 +5002,7 @@
           <p:cNvPr id="15" name="">
             <a:extLst xmlns:a="http://schemas.openxmlformats.org/drawingml/2006/main">
               <a:ext uri="{FF2B5EF4-FFF2-40B4-BE49-F238E27FC236}">
-                <a16:creationId xmlns:a16="http://schemas.microsoft.com/office/drawing/2014/main" id="{F9AC3504-C4F3-4683-B263-B326D71E2766}"/>
+                <a16:creationId xmlns:a16="http://schemas.microsoft.com/office/drawing/2014/main" id="{65F796CC-C0BB-4D19-A5AC-83FEC05DAF52}"/>
               </a:ext>
             </a:extLst>
           </p:cNvPr>
@@ -5034,7 +5034,7 @@
           <p:cNvPr id="16" name="">
             <a:extLst xmlns:a="http://schemas.openxmlformats.org/drawingml/2006/main">
               <a:ext uri="{FF2B5EF4-FFF2-40B4-BE49-F238E27FC236}">
-                <a16:creationId xmlns:a16="http://schemas.microsoft.com/office/drawing/2014/main" id="{620597DB-E352-4CD0-A128-8F788C46B912}"/>
+                <a16:creationId xmlns:a16="http://schemas.microsoft.com/office/drawing/2014/main" id="{66C624F7-E9E6-4129-AC7E-6FED5B3E7A7B}"/>
               </a:ext>
             </a:extLst>
           </p:cNvPr>
@@ -5091,7 +5091,7 @@
           <p:cNvPr id="17" name="">
             <a:extLst xmlns:a="http://schemas.openxmlformats.org/drawingml/2006/main">
               <a:ext uri="{FF2B5EF4-FFF2-40B4-BE49-F238E27FC236}">
-                <a16:creationId xmlns:a16="http://schemas.microsoft.com/office/drawing/2014/main" id="{D40FE37A-4C01-442F-B13C-51826CF11F16}"/>
+                <a16:creationId xmlns:a16="http://schemas.microsoft.com/office/drawing/2014/main" id="{6CB32F57-4AA4-4506-BF79-EEF411D17C7E}"/>
               </a:ext>
             </a:extLst>
           </p:cNvPr>
@@ -5148,7 +5148,7 @@
           <p:cNvPr id="18" name="">
             <a:extLst xmlns:a="http://schemas.openxmlformats.org/drawingml/2006/main">
               <a:ext uri="{FF2B5EF4-FFF2-40B4-BE49-F238E27FC236}">
-                <a16:creationId xmlns:a16="http://schemas.microsoft.com/office/drawing/2014/main" id="{23A75BA9-C6D3-42A1-B313-BB47FCF3AE0C}"/>
+                <a16:creationId xmlns:a16="http://schemas.microsoft.com/office/drawing/2014/main" id="{6D5DAFCD-7C57-472F-BF99-5A9F58642B01}"/>
               </a:ext>
             </a:extLst>
           </p:cNvPr>
@@ -5182,7 +5182,7 @@
           <p:cNvPr id="19" name="">
             <a:extLst xmlns:a="http://schemas.openxmlformats.org/drawingml/2006/main">
               <a:ext uri="{FF2B5EF4-FFF2-40B4-BE49-F238E27FC236}">
-                <a16:creationId xmlns:a16="http://schemas.microsoft.com/office/drawing/2014/main" id="{090E563C-ADAD-4C55-898E-DD075B5FB4D0}"/>
+                <a16:creationId xmlns:a16="http://schemas.microsoft.com/office/drawing/2014/main" id="{F36FCEAB-1F06-4594-91D2-385F2B4B392E}"/>
               </a:ext>
             </a:extLst>
           </p:cNvPr>
@@ -5214,7 +5214,7 @@
           <p:cNvPr id="20" name="">
             <a:extLst xmlns:a="http://schemas.openxmlformats.org/drawingml/2006/main">
               <a:ext uri="{FF2B5EF4-FFF2-40B4-BE49-F238E27FC236}">
-                <a16:creationId xmlns:a16="http://schemas.microsoft.com/office/drawing/2014/main" id="{EB7BC57C-4EA3-452E-8C05-4EE58C97EA8F}"/>
+                <a16:creationId xmlns:a16="http://schemas.microsoft.com/office/drawing/2014/main" id="{765A47A1-72D1-4C1D-8FE6-FB2B6F483234}"/>
               </a:ext>
             </a:extLst>
           </p:cNvPr>
@@ -5271,7 +5271,7 @@
           <p:cNvPr id="21" name="">
             <a:extLst xmlns:a="http://schemas.openxmlformats.org/drawingml/2006/main">
               <a:ext uri="{FF2B5EF4-FFF2-40B4-BE49-F238E27FC236}">
-                <a16:creationId xmlns:a16="http://schemas.microsoft.com/office/drawing/2014/main" id="{AD9EAF11-6F45-49C6-9A71-B7539F693FD3}"/>
+                <a16:creationId xmlns:a16="http://schemas.microsoft.com/office/drawing/2014/main" id="{92D7DB83-1968-4901-BE26-56BFA97FF933}"/>
               </a:ext>
             </a:extLst>
           </p:cNvPr>
@@ -5328,7 +5328,7 @@
           <p:cNvPr id="22" name="">
             <a:extLst xmlns:a="http://schemas.openxmlformats.org/drawingml/2006/main">
               <a:ext uri="{FF2B5EF4-FFF2-40B4-BE49-F238E27FC236}">
-                <a16:creationId xmlns:a16="http://schemas.microsoft.com/office/drawing/2014/main" id="{11A110CD-2018-4429-B317-16BD9809E843}"/>
+                <a16:creationId xmlns:a16="http://schemas.microsoft.com/office/drawing/2014/main" id="{FCB9A00F-0B07-4628-8A3B-7F2CB65DEBA8}"/>
               </a:ext>
             </a:extLst>
           </p:cNvPr>
@@ -5383,7 +5383,7 @@
     </p:spTree>
     <p:extLst>
       <p:ext uri="{BB962C8B-B14F-4D97-AF65-F5344CB8AC3E}">
-        <p14:creationId xmlns:p14="http://schemas.microsoft.com/office/powerpoint/2010/main" val="1693132183"/>
+        <p14:creationId xmlns:p14="http://schemas.microsoft.com/office/powerpoint/2010/main" val="306769825"/>
       </p:ext>
     </p:extLst>
   </p:cSld>
@@ -5584,7 +5584,7 @@
           <p:cNvPr id="23" name="">
             <a:extLst xmlns:a="http://schemas.openxmlformats.org/drawingml/2006/main">
               <a:ext uri="{FF2B5EF4-FFF2-40B4-BE49-F238E27FC236}">
-                <a16:creationId xmlns:a16="http://schemas.microsoft.com/office/drawing/2014/main" id="{7DCCBCC9-8A46-4C60-B593-CB2E3226C6A3}"/>
+                <a16:creationId xmlns:a16="http://schemas.microsoft.com/office/drawing/2014/main" id="{C298535C-2280-41E3-A299-F25405228BB9}"/>
               </a:ext>
             </a:extLst>
           </p:cNvPr>
@@ -5616,7 +5616,7 @@
           <p:cNvPr id="2" name="">
             <a:extLst xmlns:a="http://schemas.openxmlformats.org/drawingml/2006/main">
               <a:ext uri="{FF2B5EF4-FFF2-40B4-BE49-F238E27FC236}">
-                <a16:creationId xmlns:a16="http://schemas.microsoft.com/office/drawing/2014/main" id="{0F2E0F52-9F41-4F7B-9F9D-3BFC364CABD0}"/>
+                <a16:creationId xmlns:a16="http://schemas.microsoft.com/office/drawing/2014/main" id="{FBF1FB77-2A87-415F-94FC-4CF261E11AC9}"/>
               </a:ext>
             </a:extLst>
           </p:cNvPr>
@@ -5673,7 +5673,7 @@
           <p:cNvPr id="3" name="">
             <a:extLst xmlns:a="http://schemas.openxmlformats.org/drawingml/2006/main">
               <a:ext uri="{FF2B5EF4-FFF2-40B4-BE49-F238E27FC236}">
-                <a16:creationId xmlns:a16="http://schemas.microsoft.com/office/drawing/2014/main" id="{86E9C189-9972-4651-9F6E-CF10A712D47E}"/>
+                <a16:creationId xmlns:a16="http://schemas.microsoft.com/office/drawing/2014/main" id="{F824F56D-7AEC-4964-844C-6426CB2C3729}"/>
               </a:ext>
             </a:extLst>
           </p:cNvPr>
@@ -5705,7 +5705,7 @@
           <p:cNvPr id="4" name="">
             <a:extLst xmlns:a="http://schemas.openxmlformats.org/drawingml/2006/main">
               <a:ext uri="{FF2B5EF4-FFF2-40B4-BE49-F238E27FC236}">
-                <a16:creationId xmlns:a16="http://schemas.microsoft.com/office/drawing/2014/main" id="{ECE38886-6795-4338-BE07-5637DF873C4C}"/>
+                <a16:creationId xmlns:a16="http://schemas.microsoft.com/office/drawing/2014/main" id="{456F19A5-8860-40C1-87A7-C5B095397DB6}"/>
               </a:ext>
             </a:extLst>
           </p:cNvPr>
@@ -5762,7 +5762,7 @@
           <p:cNvPr id="5" name="">
             <a:extLst xmlns:a="http://schemas.openxmlformats.org/drawingml/2006/main">
               <a:ext uri="{FF2B5EF4-FFF2-40B4-BE49-F238E27FC236}">
-                <a16:creationId xmlns:a16="http://schemas.microsoft.com/office/drawing/2014/main" id="{ECFD36CF-AC91-4EFD-9900-788B71E46C2C}"/>
+                <a16:creationId xmlns:a16="http://schemas.microsoft.com/office/drawing/2014/main" id="{F51D93EA-2D18-45C5-B9EB-30120DC27A9B}"/>
               </a:ext>
             </a:extLst>
           </p:cNvPr>
@@ -5819,7 +5819,7 @@
           <p:cNvPr id="6" name="">
             <a:extLst xmlns:a="http://schemas.openxmlformats.org/drawingml/2006/main">
               <a:ext uri="{FF2B5EF4-FFF2-40B4-BE49-F238E27FC236}">
-                <a16:creationId xmlns:a16="http://schemas.microsoft.com/office/drawing/2014/main" id="{463F5642-97C2-4285-A37E-75DD7DD2899C}"/>
+                <a16:creationId xmlns:a16="http://schemas.microsoft.com/office/drawing/2014/main" id="{2B7E5F76-D854-4DF0-82BD-468AEE1421F2}"/>
               </a:ext>
             </a:extLst>
           </p:cNvPr>
@@ -5876,7 +5876,7 @@
           <p:cNvPr id="7" name="">
             <a:extLst xmlns:a="http://schemas.openxmlformats.org/drawingml/2006/main">
               <a:ext uri="{FF2B5EF4-FFF2-40B4-BE49-F238E27FC236}">
-                <a16:creationId xmlns:a16="http://schemas.microsoft.com/office/drawing/2014/main" id="{57A41166-3A8E-4F9A-84D4-A270861461FA}"/>
+                <a16:creationId xmlns:a16="http://schemas.microsoft.com/office/drawing/2014/main" id="{60549FA9-7748-47F0-8824-928144D9FB3A}"/>
               </a:ext>
             </a:extLst>
           </p:cNvPr>
@@ -5908,7 +5908,7 @@
           <p:cNvPr id="8" name="">
             <a:extLst xmlns:a="http://schemas.openxmlformats.org/drawingml/2006/main">
               <a:ext uri="{FF2B5EF4-FFF2-40B4-BE49-F238E27FC236}">
-                <a16:creationId xmlns:a16="http://schemas.microsoft.com/office/drawing/2014/main" id="{34A65594-CECA-4364-B2D7-9C190C8F5482}"/>
+                <a16:creationId xmlns:a16="http://schemas.microsoft.com/office/drawing/2014/main" id="{F87F6617-CC56-49E4-8ED1-78E9F1438D4F}"/>
               </a:ext>
             </a:extLst>
           </p:cNvPr>
@@ -5965,7 +5965,7 @@
           <p:cNvPr id="9" name="">
             <a:extLst xmlns:a="http://schemas.openxmlformats.org/drawingml/2006/main">
               <a:ext uri="{FF2B5EF4-FFF2-40B4-BE49-F238E27FC236}">
-                <a16:creationId xmlns:a16="http://schemas.microsoft.com/office/drawing/2014/main" id="{3BEDC2E3-7E5E-4F11-A4B6-ED59BAF7C569}"/>
+                <a16:creationId xmlns:a16="http://schemas.microsoft.com/office/drawing/2014/main" id="{23C86179-CC7E-4861-8046-D9A5E21519FD}"/>
               </a:ext>
             </a:extLst>
           </p:cNvPr>
@@ -6022,7 +6022,7 @@
           <p:cNvPr id="10" name="">
             <a:extLst xmlns:a="http://schemas.openxmlformats.org/drawingml/2006/main">
               <a:ext uri="{FF2B5EF4-FFF2-40B4-BE49-F238E27FC236}">
-                <a16:creationId xmlns:a16="http://schemas.microsoft.com/office/drawing/2014/main" id="{EA3ED42B-08E3-4AB5-8B9A-7D5657984E1D}"/>
+                <a16:creationId xmlns:a16="http://schemas.microsoft.com/office/drawing/2014/main" id="{F17EDB97-6698-4EB9-B887-2A3D0126BA52}"/>
               </a:ext>
             </a:extLst>
           </p:cNvPr>
@@ -6056,7 +6056,7 @@
           <p:cNvPr id="11" name="">
             <a:extLst xmlns:a="http://schemas.openxmlformats.org/drawingml/2006/main">
               <a:ext uri="{FF2B5EF4-FFF2-40B4-BE49-F238E27FC236}">
-                <a16:creationId xmlns:a16="http://schemas.microsoft.com/office/drawing/2014/main" id="{B72B0113-DB6B-4E29-907D-C769C7373603}"/>
+                <a16:creationId xmlns:a16="http://schemas.microsoft.com/office/drawing/2014/main" id="{29D8CF20-8E7B-437D-8583-E5513781CF44}"/>
               </a:ext>
             </a:extLst>
           </p:cNvPr>
@@ -6088,7 +6088,7 @@
           <p:cNvPr id="12" name="">
             <a:extLst xmlns:a="http://schemas.openxmlformats.org/drawingml/2006/main">
               <a:ext uri="{FF2B5EF4-FFF2-40B4-BE49-F238E27FC236}">
-                <a16:creationId xmlns:a16="http://schemas.microsoft.com/office/drawing/2014/main" id="{483104FC-C26F-409C-B7B7-0D1EDE7F5CC6}"/>
+                <a16:creationId xmlns:a16="http://schemas.microsoft.com/office/drawing/2014/main" id="{CFC9BDBC-1627-496B-85E2-89C5436B45BF}"/>
               </a:ext>
             </a:extLst>
           </p:cNvPr>
@@ -6145,7 +6145,7 @@
           <p:cNvPr id="13" name="">
             <a:extLst xmlns:a="http://schemas.openxmlformats.org/drawingml/2006/main">
               <a:ext uri="{FF2B5EF4-FFF2-40B4-BE49-F238E27FC236}">
-                <a16:creationId xmlns:a16="http://schemas.microsoft.com/office/drawing/2014/main" id="{097E9561-EFAD-4411-92B6-7CBEEC052897}"/>
+                <a16:creationId xmlns:a16="http://schemas.microsoft.com/office/drawing/2014/main" id="{A21ECDA7-151A-4A8C-8D67-1EAB6ECCB4DA}"/>
               </a:ext>
             </a:extLst>
           </p:cNvPr>
@@ -6202,7 +6202,7 @@
           <p:cNvPr id="14" name="">
             <a:extLst xmlns:a="http://schemas.openxmlformats.org/drawingml/2006/main">
               <a:ext uri="{FF2B5EF4-FFF2-40B4-BE49-F238E27FC236}">
-                <a16:creationId xmlns:a16="http://schemas.microsoft.com/office/drawing/2014/main" id="{5D98BEC0-57EC-4403-81B0-B2DD340B7C32}"/>
+                <a16:creationId xmlns:a16="http://schemas.microsoft.com/office/drawing/2014/main" id="{BD386EB0-8648-47E3-A4FD-D3A45C7C2BA6}"/>
               </a:ext>
             </a:extLst>
           </p:cNvPr>
@@ -6236,7 +6236,7 @@
           <p:cNvPr id="15" name="">
             <a:extLst xmlns:a="http://schemas.openxmlformats.org/drawingml/2006/main">
               <a:ext uri="{FF2B5EF4-FFF2-40B4-BE49-F238E27FC236}">
-                <a16:creationId xmlns:a16="http://schemas.microsoft.com/office/drawing/2014/main" id="{3AC83D62-E2CE-40CD-9F43-CBBF4FFD9113}"/>
+                <a16:creationId xmlns:a16="http://schemas.microsoft.com/office/drawing/2014/main" id="{E75D81CB-6AE4-4BDC-A048-ECE420F5F4B0}"/>
               </a:ext>
             </a:extLst>
           </p:cNvPr>
@@ -6268,7 +6268,7 @@
           <p:cNvPr id="16" name="">
             <a:extLst xmlns:a="http://schemas.openxmlformats.org/drawingml/2006/main">
               <a:ext uri="{FF2B5EF4-FFF2-40B4-BE49-F238E27FC236}">
-                <a16:creationId xmlns:a16="http://schemas.microsoft.com/office/drawing/2014/main" id="{E7DB5D13-89D9-42A9-ACCF-8D412C652CE8}"/>
+                <a16:creationId xmlns:a16="http://schemas.microsoft.com/office/drawing/2014/main" id="{E05BA83E-07B3-4F33-8F8F-E9C31E350B26}"/>
               </a:ext>
             </a:extLst>
           </p:cNvPr>
@@ -6325,7 +6325,7 @@
           <p:cNvPr id="17" name="">
             <a:extLst xmlns:a="http://schemas.openxmlformats.org/drawingml/2006/main">
               <a:ext uri="{FF2B5EF4-FFF2-40B4-BE49-F238E27FC236}">
-                <a16:creationId xmlns:a16="http://schemas.microsoft.com/office/drawing/2014/main" id="{585FC01E-8C09-4BD2-B87E-7383E6A991DA}"/>
+                <a16:creationId xmlns:a16="http://schemas.microsoft.com/office/drawing/2014/main" id="{C8A401BB-32E6-4738-B29E-1E64DBA35617}"/>
               </a:ext>
             </a:extLst>
           </p:cNvPr>
@@ -6382,7 +6382,7 @@
           <p:cNvPr id="18" name="">
             <a:extLst xmlns:a="http://schemas.openxmlformats.org/drawingml/2006/main">
               <a:ext uri="{FF2B5EF4-FFF2-40B4-BE49-F238E27FC236}">
-                <a16:creationId xmlns:a16="http://schemas.microsoft.com/office/drawing/2014/main" id="{2464E4AE-726E-4886-92C2-02E638F5D727}"/>
+                <a16:creationId xmlns:a16="http://schemas.microsoft.com/office/drawing/2014/main" id="{D2CA60F3-42D8-48C3-87D2-CDD2F572D14B}"/>
               </a:ext>
             </a:extLst>
           </p:cNvPr>
@@ -6416,7 +6416,7 @@
           <p:cNvPr id="19" name="">
             <a:extLst xmlns:a="http://schemas.openxmlformats.org/drawingml/2006/main">
               <a:ext uri="{FF2B5EF4-FFF2-40B4-BE49-F238E27FC236}">
-                <a16:creationId xmlns:a16="http://schemas.microsoft.com/office/drawing/2014/main" id="{7D8B9C1C-02D0-407B-AD54-7C2D494C7297}"/>
+                <a16:creationId xmlns:a16="http://schemas.microsoft.com/office/drawing/2014/main" id="{5A21F410-8CD1-48E8-8B7E-94425E754603}"/>
               </a:ext>
             </a:extLst>
           </p:cNvPr>
@@ -6448,7 +6448,7 @@
           <p:cNvPr id="20" name="">
             <a:extLst xmlns:a="http://schemas.openxmlformats.org/drawingml/2006/main">
               <a:ext uri="{FF2B5EF4-FFF2-40B4-BE49-F238E27FC236}">
-                <a16:creationId xmlns:a16="http://schemas.microsoft.com/office/drawing/2014/main" id="{1596A4CA-E4FC-4121-8F79-FBBF7E71C33E}"/>
+                <a16:creationId xmlns:a16="http://schemas.microsoft.com/office/drawing/2014/main" id="{D8079179-A787-4EEE-A87B-79C6406BEF62}"/>
               </a:ext>
             </a:extLst>
           </p:cNvPr>
@@ -6505,7 +6505,7 @@
           <p:cNvPr id="21" name="">
             <a:extLst xmlns:a="http://schemas.openxmlformats.org/drawingml/2006/main">
               <a:ext uri="{FF2B5EF4-FFF2-40B4-BE49-F238E27FC236}">
-                <a16:creationId xmlns:a16="http://schemas.microsoft.com/office/drawing/2014/main" id="{5C708C93-9E34-444D-AA42-3986927D4420}"/>
+                <a16:creationId xmlns:a16="http://schemas.microsoft.com/office/drawing/2014/main" id="{B7107155-B09D-4961-B977-2AA9B83EDE70}"/>
               </a:ext>
             </a:extLst>
           </p:cNvPr>
@@ -6562,7 +6562,7 @@
           <p:cNvPr id="22" name="">
             <a:extLst xmlns:a="http://schemas.openxmlformats.org/drawingml/2006/main">
               <a:ext uri="{FF2B5EF4-FFF2-40B4-BE49-F238E27FC236}">
-                <a16:creationId xmlns:a16="http://schemas.microsoft.com/office/drawing/2014/main" id="{A1D1F5A2-5474-49F6-8454-56A00D098176}"/>
+                <a16:creationId xmlns:a16="http://schemas.microsoft.com/office/drawing/2014/main" id="{73B4902F-90B1-4DBE-90F7-E4A597AC53F8}"/>
               </a:ext>
             </a:extLst>
           </p:cNvPr>
@@ -6617,7 +6617,7 @@
     </p:spTree>
     <p:extLst>
       <p:ext uri="{BB962C8B-B14F-4D97-AF65-F5344CB8AC3E}">
-        <p14:creationId xmlns:p14="http://schemas.microsoft.com/office/powerpoint/2010/main" val="450836727"/>
+        <p14:creationId xmlns:p14="http://schemas.microsoft.com/office/powerpoint/2010/main" val="1569908968"/>
       </p:ext>
     </p:extLst>
   </p:cSld>
@@ -6818,7 +6818,7 @@
           <p:cNvPr id="16" name="">
             <a:extLst xmlns:a="http://schemas.openxmlformats.org/drawingml/2006/main">
               <a:ext uri="{FF2B5EF4-FFF2-40B4-BE49-F238E27FC236}">
-                <a16:creationId xmlns:a16="http://schemas.microsoft.com/office/drawing/2014/main" id="{98E3CA12-C182-46EA-B55D-998A06F2F267}"/>
+                <a16:creationId xmlns:a16="http://schemas.microsoft.com/office/drawing/2014/main" id="{379CF4DE-951D-471C-844A-65769D9835C5}"/>
               </a:ext>
             </a:extLst>
           </p:cNvPr>
@@ -6850,7 +6850,7 @@
           <p:cNvPr id="2" name="">
             <a:extLst xmlns:a="http://schemas.openxmlformats.org/drawingml/2006/main">
               <a:ext uri="{FF2B5EF4-FFF2-40B4-BE49-F238E27FC236}">
-                <a16:creationId xmlns:a16="http://schemas.microsoft.com/office/drawing/2014/main" id="{8CA2472E-D77C-40C5-B8B8-4EC5556C84FB}"/>
+                <a16:creationId xmlns:a16="http://schemas.microsoft.com/office/drawing/2014/main" id="{9500EF5B-5FF5-4806-A584-E08CCC6A1CF7}"/>
               </a:ext>
             </a:extLst>
           </p:cNvPr>
@@ -6907,7 +6907,7 @@
           <p:cNvPr id="3" name="">
             <a:extLst xmlns:a="http://schemas.openxmlformats.org/drawingml/2006/main">
               <a:ext uri="{FF2B5EF4-FFF2-40B4-BE49-F238E27FC236}">
-                <a16:creationId xmlns:a16="http://schemas.microsoft.com/office/drawing/2014/main" id="{E0E803CE-E471-4608-B217-EC01A366BEF6}"/>
+                <a16:creationId xmlns:a16="http://schemas.microsoft.com/office/drawing/2014/main" id="{AF5C8D77-5FAD-4882-9F40-9EB8BD464AB3}"/>
               </a:ext>
             </a:extLst>
           </p:cNvPr>
@@ -6939,7 +6939,7 @@
           <p:cNvPr id="4" name="">
             <a:extLst xmlns:a="http://schemas.openxmlformats.org/drawingml/2006/main">
               <a:ext uri="{FF2B5EF4-FFF2-40B4-BE49-F238E27FC236}">
-                <a16:creationId xmlns:a16="http://schemas.microsoft.com/office/drawing/2014/main" id="{5BC48F88-D1B2-4B00-8EC7-E1B8E8D8085D}"/>
+                <a16:creationId xmlns:a16="http://schemas.microsoft.com/office/drawing/2014/main" id="{C162EA0C-856A-4DDB-8DE9-9CE3F6E5F7CA}"/>
               </a:ext>
             </a:extLst>
           </p:cNvPr>
@@ -6996,7 +6996,7 @@
           <p:cNvPr id="5" name="">
             <a:extLst xmlns:a="http://schemas.openxmlformats.org/drawingml/2006/main">
               <a:ext uri="{FF2B5EF4-FFF2-40B4-BE49-F238E27FC236}">
-                <a16:creationId xmlns:a16="http://schemas.microsoft.com/office/drawing/2014/main" id="{AD009089-4005-4370-8E47-88CA907395B4}"/>
+                <a16:creationId xmlns:a16="http://schemas.microsoft.com/office/drawing/2014/main" id="{DF930BC4-2638-4F18-B321-9795DA7A3178}"/>
               </a:ext>
             </a:extLst>
           </p:cNvPr>
@@ -7053,7 +7053,7 @@
           <p:cNvPr id="6" name="">
             <a:extLst xmlns:a="http://schemas.openxmlformats.org/drawingml/2006/main">
               <a:ext uri="{FF2B5EF4-FFF2-40B4-BE49-F238E27FC236}">
-                <a16:creationId xmlns:a16="http://schemas.microsoft.com/office/drawing/2014/main" id="{F78E88B6-CD9C-4D81-8895-A45622B6056E}"/>
+                <a16:creationId xmlns:a16="http://schemas.microsoft.com/office/drawing/2014/main" id="{48EAA2BF-59C9-4987-9B16-7C883B639C66}"/>
               </a:ext>
             </a:extLst>
           </p:cNvPr>
@@ -7110,7 +7110,7 @@
           <p:cNvPr id="7" name="">
             <a:extLst xmlns:a="http://schemas.openxmlformats.org/drawingml/2006/main">
               <a:ext uri="{FF2B5EF4-FFF2-40B4-BE49-F238E27FC236}">
-                <a16:creationId xmlns:a16="http://schemas.microsoft.com/office/drawing/2014/main" id="{46938340-15BA-464E-84AE-F66AD327FE49}"/>
+                <a16:creationId xmlns:a16="http://schemas.microsoft.com/office/drawing/2014/main" id="{EC385545-3F38-43B0-8E02-7F658CD384B3}"/>
               </a:ext>
             </a:extLst>
           </p:cNvPr>
@@ -7142,7 +7142,7 @@
           <p:cNvPr id="8" name="">
             <a:extLst xmlns:a="http://schemas.openxmlformats.org/drawingml/2006/main">
               <a:ext uri="{FF2B5EF4-FFF2-40B4-BE49-F238E27FC236}">
-                <a16:creationId xmlns:a16="http://schemas.microsoft.com/office/drawing/2014/main" id="{56B28A0A-D970-419B-AC3D-E852F641EFEB}"/>
+                <a16:creationId xmlns:a16="http://schemas.microsoft.com/office/drawing/2014/main" id="{DF136776-651A-4ECC-811A-EFEE4C035130}"/>
               </a:ext>
             </a:extLst>
           </p:cNvPr>
@@ -7199,7 +7199,7 @@
           <p:cNvPr id="9" name="">
             <a:extLst xmlns:a="http://schemas.openxmlformats.org/drawingml/2006/main">
               <a:ext uri="{FF2B5EF4-FFF2-40B4-BE49-F238E27FC236}">
-                <a16:creationId xmlns:a16="http://schemas.microsoft.com/office/drawing/2014/main" id="{04C100DB-6D50-4EE9-91A9-34A2F113214D}"/>
+                <a16:creationId xmlns:a16="http://schemas.microsoft.com/office/drawing/2014/main" id="{BFEAE0A5-9926-44ED-8CC5-68AD3BD27E03}"/>
               </a:ext>
             </a:extLst>
           </p:cNvPr>
@@ -7256,7 +7256,7 @@
           <p:cNvPr id="10" name="">
             <a:extLst xmlns:a="http://schemas.openxmlformats.org/drawingml/2006/main">
               <a:ext uri="{FF2B5EF4-FFF2-40B4-BE49-F238E27FC236}">
-                <a16:creationId xmlns:a16="http://schemas.microsoft.com/office/drawing/2014/main" id="{39661CDF-091E-4C77-88EF-43E5E79BF079}"/>
+                <a16:creationId xmlns:a16="http://schemas.microsoft.com/office/drawing/2014/main" id="{457A3E05-7F7D-4C23-BA35-AF3CD6AE4B4F}"/>
               </a:ext>
             </a:extLst>
           </p:cNvPr>
@@ -7313,7 +7313,7 @@
           <p:cNvPr id="11" name="">
             <a:extLst xmlns:a="http://schemas.openxmlformats.org/drawingml/2006/main">
               <a:ext uri="{FF2B5EF4-FFF2-40B4-BE49-F238E27FC236}">
-                <a16:creationId xmlns:a16="http://schemas.microsoft.com/office/drawing/2014/main" id="{FD671A26-91BA-4487-93AE-CF1BA39B0D44}"/>
+                <a16:creationId xmlns:a16="http://schemas.microsoft.com/office/drawing/2014/main" id="{E3980895-4851-48AE-9A4B-ADEDC4F29461}"/>
               </a:ext>
             </a:extLst>
           </p:cNvPr>
@@ -7345,7 +7345,7 @@
           <p:cNvPr id="12" name="">
             <a:extLst xmlns:a="http://schemas.openxmlformats.org/drawingml/2006/main">
               <a:ext uri="{FF2B5EF4-FFF2-40B4-BE49-F238E27FC236}">
-                <a16:creationId xmlns:a16="http://schemas.microsoft.com/office/drawing/2014/main" id="{0AD61D1A-359C-4665-BCF0-FD93779D82F4}"/>
+                <a16:creationId xmlns:a16="http://schemas.microsoft.com/office/drawing/2014/main" id="{39FD6F54-8DEB-4E4B-AE7C-D0BD263F13B6}"/>
               </a:ext>
             </a:extLst>
           </p:cNvPr>
@@ -7402,7 +7402,7 @@
           <p:cNvPr id="13" name="">
             <a:extLst xmlns:a="http://schemas.openxmlformats.org/drawingml/2006/main">
               <a:ext uri="{FF2B5EF4-FFF2-40B4-BE49-F238E27FC236}">
-                <a16:creationId xmlns:a16="http://schemas.microsoft.com/office/drawing/2014/main" id="{2CBD3D8F-C3AE-406C-8CD8-7B543155FCC0}"/>
+                <a16:creationId xmlns:a16="http://schemas.microsoft.com/office/drawing/2014/main" id="{7E856027-FB1C-4448-AF56-4D3ECCD6FB69}"/>
               </a:ext>
             </a:extLst>
           </p:cNvPr>
@@ -7459,7 +7459,7 @@
           <p:cNvPr id="14" name="">
             <a:extLst xmlns:a="http://schemas.openxmlformats.org/drawingml/2006/main">
               <a:ext uri="{FF2B5EF4-FFF2-40B4-BE49-F238E27FC236}">
-                <a16:creationId xmlns:a16="http://schemas.microsoft.com/office/drawing/2014/main" id="{B088708A-1064-43FB-A921-F9AC7CA1F415}"/>
+                <a16:creationId xmlns:a16="http://schemas.microsoft.com/office/drawing/2014/main" id="{299BD346-B7FD-473A-9306-E01ADA863A61}"/>
               </a:ext>
             </a:extLst>
           </p:cNvPr>
@@ -7516,7 +7516,7 @@
           <p:cNvPr id="15" name="">
             <a:extLst xmlns:a="http://schemas.openxmlformats.org/drawingml/2006/main">
               <a:ext uri="{FF2B5EF4-FFF2-40B4-BE49-F238E27FC236}">
-                <a16:creationId xmlns:a16="http://schemas.microsoft.com/office/drawing/2014/main" id="{DB171832-DDDC-47CF-9FBF-4D529E758C1A}"/>
+                <a16:creationId xmlns:a16="http://schemas.microsoft.com/office/drawing/2014/main" id="{3507C7CE-084C-49E6-8415-6DED6AE53088}"/>
               </a:ext>
             </a:extLst>
           </p:cNvPr>
@@ -7571,7 +7571,7 @@
     </p:spTree>
     <p:extLst>
       <p:ext uri="{BB962C8B-B14F-4D97-AF65-F5344CB8AC3E}">
-        <p14:creationId xmlns:p14="http://schemas.microsoft.com/office/powerpoint/2010/main" val="1767761988"/>
+        <p14:creationId xmlns:p14="http://schemas.microsoft.com/office/powerpoint/2010/main" val="191043704"/>
       </p:ext>
     </p:extLst>
   </p:cSld>
@@ -7769,10 +7769,10 @@
       </p:grpSpPr>
       <p:sp>
         <p:nvSpPr>
-          <p:cNvPr id="23" name="">
-            <a:extLst xmlns:a="http://schemas.openxmlformats.org/drawingml/2006/main">
-              <a:ext uri="{FF2B5EF4-FFF2-40B4-BE49-F238E27FC236}">
-                <a16:creationId xmlns:a16="http://schemas.microsoft.com/office/drawing/2014/main" id="{79F276E7-9F24-482F-B593-1F89F2CA4C10}"/>
+          <p:cNvPr id="26" name="">
+            <a:extLst xmlns:a="http://schemas.openxmlformats.org/drawingml/2006/main">
+              <a:ext uri="{FF2B5EF4-FFF2-40B4-BE49-F238E27FC236}">
+                <a16:creationId xmlns:a16="http://schemas.microsoft.com/office/drawing/2014/main" id="{D5F919DD-8919-4F88-A668-CB8511744B29}"/>
               </a:ext>
             </a:extLst>
           </p:cNvPr>
@@ -7804,7 +7804,7 @@
           <p:cNvPr id="2" name="">
             <a:extLst xmlns:a="http://schemas.openxmlformats.org/drawingml/2006/main">
               <a:ext uri="{FF2B5EF4-FFF2-40B4-BE49-F238E27FC236}">
-                <a16:creationId xmlns:a16="http://schemas.microsoft.com/office/drawing/2014/main" id="{855F4F15-6D84-4604-B4CB-D6119A5A1E6E}"/>
+                <a16:creationId xmlns:a16="http://schemas.microsoft.com/office/drawing/2014/main" id="{C654158C-D015-45AF-9674-F51F15237EC3}"/>
               </a:ext>
             </a:extLst>
           </p:cNvPr>
@@ -7861,7 +7861,7 @@
           <p:cNvPr id="3" name="">
             <a:extLst xmlns:a="http://schemas.openxmlformats.org/drawingml/2006/main">
               <a:ext uri="{FF2B5EF4-FFF2-40B4-BE49-F238E27FC236}">
-                <a16:creationId xmlns:a16="http://schemas.microsoft.com/office/drawing/2014/main" id="{3432349E-4781-44A3-A8EE-7283B3B2DEA9}"/>
+                <a16:creationId xmlns:a16="http://schemas.microsoft.com/office/drawing/2014/main" id="{C22BC225-170C-4194-A7B0-2E73C5569153}"/>
               </a:ext>
             </a:extLst>
           </p:cNvPr>
@@ -7893,7 +7893,7 @@
           <p:cNvPr id="4" name="">
             <a:extLst xmlns:a="http://schemas.openxmlformats.org/drawingml/2006/main">
               <a:ext uri="{FF2B5EF4-FFF2-40B4-BE49-F238E27FC236}">
-                <a16:creationId xmlns:a16="http://schemas.microsoft.com/office/drawing/2014/main" id="{35117E03-FCDA-4DCB-873D-7A0C38E4E220}"/>
+                <a16:creationId xmlns:a16="http://schemas.microsoft.com/office/drawing/2014/main" id="{68C122AF-7C24-4562-9F7B-6A37B15D7F9B}"/>
               </a:ext>
             </a:extLst>
           </p:cNvPr>
@@ -7950,7 +7950,7 @@
           <p:cNvPr id="5" name="">
             <a:extLst xmlns:a="http://schemas.openxmlformats.org/drawingml/2006/main">
               <a:ext uri="{FF2B5EF4-FFF2-40B4-BE49-F238E27FC236}">
-                <a16:creationId xmlns:a16="http://schemas.microsoft.com/office/drawing/2014/main" id="{2D9AF2C3-0EBE-42C9-91C3-3E9CFB5E9037}"/>
+                <a16:creationId xmlns:a16="http://schemas.microsoft.com/office/drawing/2014/main" id="{D838B135-8238-4782-83C7-53C4326552E5}"/>
               </a:ext>
             </a:extLst>
           </p:cNvPr>
@@ -8007,7 +8007,7 @@
           <p:cNvPr id="6" name="">
             <a:extLst xmlns:a="http://schemas.openxmlformats.org/drawingml/2006/main">
               <a:ext uri="{FF2B5EF4-FFF2-40B4-BE49-F238E27FC236}">
-                <a16:creationId xmlns:a16="http://schemas.microsoft.com/office/drawing/2014/main" id="{A1D07283-7220-4339-AB5E-F1A1A4FC7C8C}"/>
+                <a16:creationId xmlns:a16="http://schemas.microsoft.com/office/drawing/2014/main" id="{CFD6AB72-62E9-47F9-97A8-F597FD1A35FA}"/>
               </a:ext>
             </a:extLst>
           </p:cNvPr>
@@ -8064,7 +8064,7 @@
           <p:cNvPr id="7" name="">
             <a:extLst xmlns:a="http://schemas.openxmlformats.org/drawingml/2006/main">
               <a:ext uri="{FF2B5EF4-FFF2-40B4-BE49-F238E27FC236}">
-                <a16:creationId xmlns:a16="http://schemas.microsoft.com/office/drawing/2014/main" id="{50CB83CA-B230-4817-B64F-CB99E24079E6}"/>
+                <a16:creationId xmlns:a16="http://schemas.microsoft.com/office/drawing/2014/main" id="{BE11C36D-963C-47E3-A2DE-15632B8ED202}"/>
               </a:ext>
             </a:extLst>
           </p:cNvPr>
@@ -8096,7 +8096,7 @@
           <p:cNvPr id="8" name="">
             <a:extLst xmlns:a="http://schemas.openxmlformats.org/drawingml/2006/main">
               <a:ext uri="{FF2B5EF4-FFF2-40B4-BE49-F238E27FC236}">
-                <a16:creationId xmlns:a16="http://schemas.microsoft.com/office/drawing/2014/main" id="{B9D21778-5204-4F01-9537-E5CDED33CDE9}"/>
+                <a16:creationId xmlns:a16="http://schemas.microsoft.com/office/drawing/2014/main" id="{DDD82FF5-7587-49F3-A139-86EEA3CE1926}"/>
               </a:ext>
             </a:extLst>
           </p:cNvPr>
@@ -8153,7 +8153,7 @@
           <p:cNvPr id="9" name="">
             <a:extLst xmlns:a="http://schemas.openxmlformats.org/drawingml/2006/main">
               <a:ext uri="{FF2B5EF4-FFF2-40B4-BE49-F238E27FC236}">
-                <a16:creationId xmlns:a16="http://schemas.microsoft.com/office/drawing/2014/main" id="{881AFE99-08D0-48EE-BDE2-7235FBCC26D8}"/>
+                <a16:creationId xmlns:a16="http://schemas.microsoft.com/office/drawing/2014/main" id="{0A180467-72F9-4738-A7E5-2448517E5200}"/>
               </a:ext>
             </a:extLst>
           </p:cNvPr>
@@ -8210,19 +8210,19 @@
           <p:cNvPr id="10" name="">
             <a:extLst xmlns:a="http://schemas.openxmlformats.org/drawingml/2006/main">
               <a:ext uri="{FF2B5EF4-FFF2-40B4-BE49-F238E27FC236}">
-                <a16:creationId xmlns:a16="http://schemas.microsoft.com/office/drawing/2014/main" id="{A3CDD9D4-81C0-459C-AF6B-C3F182BE7DE4}"/>
-              </a:ext>
-            </a:extLst>
-          </p:cNvPr>
-          <p:cNvSpPr>
-            <a:spLocks xmlns:a="http://schemas.openxmlformats.org/drawingml/2006/main" noGrp="1"/>
-          </p:cNvSpPr>
-          <p:nvPr/>
-        </p:nvSpPr>
-        <p:spPr>
-          <a:xfrm xmlns:a="http://schemas.openxmlformats.org/drawingml/2006/main">
-            <a:off x="914400" y="1257300"/>
-            <a:ext cx="10363200" cy="781050"/>
+                <a16:creationId xmlns:a16="http://schemas.microsoft.com/office/drawing/2014/main" id="{DD3CAE84-7F28-4ACF-8A4F-206AD4327D66}"/>
+              </a:ext>
+            </a:extLst>
+          </p:cNvPr>
+          <p:cNvSpPr>
+            <a:spLocks xmlns:a="http://schemas.openxmlformats.org/drawingml/2006/main" noGrp="1"/>
+          </p:cNvSpPr>
+          <p:nvPr/>
+        </p:nvSpPr>
+        <p:spPr>
+          <a:xfrm xmlns:a="http://schemas.openxmlformats.org/drawingml/2006/main">
+            <a:off x="857250" y="1219200"/>
+            <a:ext cx="10477500" cy="742950"/>
           </a:xfrm>
           <a:prstGeom xmlns:a="http://schemas.openxmlformats.org/drawingml/2006/main" prst="rect">
             <a:avLst/>
@@ -8239,7 +8239,7 @@
           <a:lstStyle xmlns:a="http://schemas.openxmlformats.org/drawingml/2006/main"/>
           <a:p xmlns:a="http://schemas.openxmlformats.org/drawingml/2006/main">
             <a:pPr algn="ctr">
-              <a:defRPr sz="2175" b="1">
+              <a:defRPr sz="2100" b="1">
                 <a:solidFill>
                   <a:srgbClr val="17253A"/>
                 </a:solidFill>
@@ -8249,7 +8249,7 @@
               </a:defRPr>
             </a:pPr>
             <a:r>
-              <a:rPr sz="2175" b="1">
+              <a:rPr sz="2100" b="1">
                 <a:solidFill>
                   <a:srgbClr val="17253A"/>
                 </a:solidFill>
@@ -8267,28 +8267,30 @@
           <p:cNvPr id="11" name="">
             <a:extLst xmlns:a="http://schemas.openxmlformats.org/drawingml/2006/main">
               <a:ext uri="{FF2B5EF4-FFF2-40B4-BE49-F238E27FC236}">
-                <a16:creationId xmlns:a16="http://schemas.microsoft.com/office/drawing/2014/main" id="{4699890F-E74B-4492-AA29-7232FA16932A}"/>
-              </a:ext>
-            </a:extLst>
-          </p:cNvPr>
-          <p:cNvSpPr>
-            <a:spLocks xmlns:a="http://schemas.openxmlformats.org/drawingml/2006/main" noGrp="1"/>
-          </p:cNvSpPr>
-          <p:nvPr/>
-        </p:nvSpPr>
-        <p:spPr>
-          <a:xfrm xmlns:a="http://schemas.openxmlformats.org/drawingml/2006/main">
-            <a:off x="1000125" y="2247900"/>
-            <a:ext cx="476250" cy="476250"/>
-          </a:xfrm>
-          <a:prstGeom xmlns:a="http://schemas.openxmlformats.org/drawingml/2006/main" prst="ellipse">
+                <a16:creationId xmlns:a16="http://schemas.microsoft.com/office/drawing/2014/main" id="{6A8677B6-DFCD-497F-A180-FC0C75C1176F}"/>
+              </a:ext>
+            </a:extLst>
+          </p:cNvPr>
+          <p:cNvSpPr>
+            <a:spLocks xmlns:a="http://schemas.openxmlformats.org/drawingml/2006/main" noGrp="1"/>
+          </p:cNvSpPr>
+          <p:nvPr/>
+        </p:nvSpPr>
+        <p:spPr>
+          <a:xfrm xmlns:a="http://schemas.openxmlformats.org/drawingml/2006/main">
+            <a:off x="971550" y="2124075"/>
+            <a:ext cx="38100" cy="3524250"/>
+          </a:xfrm>
+          <a:prstGeom xmlns:a="http://schemas.openxmlformats.org/drawingml/2006/main" prst="rect">
             <a:avLst/>
           </a:prstGeom>
           <a:solidFill xmlns:a="http://schemas.openxmlformats.org/drawingml/2006/main">
-            <a:srgbClr val="18324A"/>
+            <a:srgbClr val="2C6E73"/>
           </a:solidFill>
           <a:ln xmlns:a="http://schemas.openxmlformats.org/drawingml/2006/main" w="0">
-            <a:noFill/>
+            <a:solidFill>
+              <a:srgbClr val="2C6E73"/>
+            </a:solidFill>
           </a:ln>
         </p:spPr>
       </p:sp>
@@ -8297,19 +8299,19 @@
           <p:cNvPr id="12" name="">
             <a:extLst xmlns:a="http://schemas.openxmlformats.org/drawingml/2006/main">
               <a:ext uri="{FF2B5EF4-FFF2-40B4-BE49-F238E27FC236}">
-                <a16:creationId xmlns:a16="http://schemas.microsoft.com/office/drawing/2014/main" id="{19821114-EE4A-42AD-9FF1-CDB931FD05E6}"/>
-              </a:ext>
-            </a:extLst>
-          </p:cNvPr>
-          <p:cNvSpPr>
-            <a:spLocks xmlns:a="http://schemas.openxmlformats.org/drawingml/2006/main" noGrp="1"/>
-          </p:cNvSpPr>
-          <p:nvPr/>
-        </p:nvSpPr>
-        <p:spPr>
-          <a:xfrm xmlns:a="http://schemas.openxmlformats.org/drawingml/2006/main">
-            <a:off x="1000125" y="2276475"/>
-            <a:ext cx="476250" cy="419100"/>
+                <a16:creationId xmlns:a16="http://schemas.microsoft.com/office/drawing/2014/main" id="{A95588A0-D4D2-4C62-9977-58856D3A5954}"/>
+              </a:ext>
+            </a:extLst>
+          </p:cNvPr>
+          <p:cNvSpPr>
+            <a:spLocks xmlns:a="http://schemas.openxmlformats.org/drawingml/2006/main" noGrp="1"/>
+          </p:cNvSpPr>
+          <p:nvPr/>
+        </p:nvSpPr>
+        <p:spPr>
+          <a:xfrm xmlns:a="http://schemas.openxmlformats.org/drawingml/2006/main">
+            <a:off x="1162050" y="2200275"/>
+            <a:ext cx="400050" cy="400050"/>
           </a:xfrm>
           <a:prstGeom xmlns:a="http://schemas.openxmlformats.org/drawingml/2006/main" prst="rect">
             <a:avLst/>
@@ -8326,9 +8328,9 @@
           <a:lstStyle xmlns:a="http://schemas.openxmlformats.org/drawingml/2006/main"/>
           <a:p xmlns:a="http://schemas.openxmlformats.org/drawingml/2006/main">
             <a:pPr algn="ctr">
-              <a:defRPr sz="1350" b="1">
-                <a:solidFill>
-                  <a:srgbClr val="FFFFFF"/>
+              <a:defRPr sz="1125" b="1">
+                <a:solidFill>
+                  <a:srgbClr val="2C6E73"/>
                 </a:solidFill>
                 <a:latin typeface="Arial"/>
                 <a:ea typeface="Arial"/>
@@ -8336,9 +8338,9 @@
               </a:defRPr>
             </a:pPr>
             <a:r>
-              <a:rPr sz="1350" b="1">
-                <a:solidFill>
-                  <a:srgbClr val="FFFFFF"/>
+              <a:rPr sz="1125" b="1">
+                <a:solidFill>
+                  <a:srgbClr val="2C6E73"/>
                 </a:solidFill>
                 <a:latin typeface="Arial"/>
                 <a:ea typeface="Arial"/>
@@ -8354,19 +8356,19 @@
           <p:cNvPr id="13" name="">
             <a:extLst xmlns:a="http://schemas.openxmlformats.org/drawingml/2006/main">
               <a:ext uri="{FF2B5EF4-FFF2-40B4-BE49-F238E27FC236}">
-                <a16:creationId xmlns:a16="http://schemas.microsoft.com/office/drawing/2014/main" id="{473FF4A7-3DFC-4200-AF82-F4ABC92885A5}"/>
-              </a:ext>
-            </a:extLst>
-          </p:cNvPr>
-          <p:cNvSpPr>
-            <a:spLocks xmlns:a="http://schemas.openxmlformats.org/drawingml/2006/main" noGrp="1"/>
-          </p:cNvSpPr>
-          <p:nvPr/>
-        </p:nvSpPr>
-        <p:spPr>
-          <a:xfrm xmlns:a="http://schemas.openxmlformats.org/drawingml/2006/main">
-            <a:off x="1714500" y="2181225"/>
-            <a:ext cx="9429750" cy="609600"/>
+                <a16:creationId xmlns:a16="http://schemas.microsoft.com/office/drawing/2014/main" id="{F9DEA744-6976-41C3-AEBB-130522BB9719}"/>
+              </a:ext>
+            </a:extLst>
+          </p:cNvPr>
+          <p:cNvSpPr>
+            <a:spLocks xmlns:a="http://schemas.openxmlformats.org/drawingml/2006/main" noGrp="1"/>
+          </p:cNvSpPr>
+          <p:nvPr/>
+        </p:nvSpPr>
+        <p:spPr>
+          <a:xfrm xmlns:a="http://schemas.openxmlformats.org/drawingml/2006/main">
+            <a:off x="1714500" y="2114550"/>
+            <a:ext cx="9525000" cy="638175"/>
           </a:xfrm>
           <a:prstGeom xmlns:a="http://schemas.openxmlformats.org/drawingml/2006/main" prst="rect">
             <a:avLst/>
@@ -8383,7 +8385,7 @@
           <a:lstStyle xmlns:a="http://schemas.openxmlformats.org/drawingml/2006/main"/>
           <a:p xmlns:a="http://schemas.openxmlformats.org/drawingml/2006/main">
             <a:pPr algn="l">
-              <a:defRPr sz="1500" b="0">
+              <a:defRPr sz="1575" b="0">
                 <a:solidFill>
                   <a:srgbClr val="17253A"/>
                 </a:solidFill>
@@ -8393,7 +8395,7 @@
               </a:defRPr>
             </a:pPr>
             <a:r>
-              <a:rPr sz="1500" b="0">
+              <a:rPr sz="1575" b="0">
                 <a:solidFill>
                   <a:srgbClr val="17253A"/>
                 </a:solidFill>
@@ -8401,7 +8403,7 @@
                 <a:ea typeface="Arial"/>
                 <a:cs typeface="Arial"/>
               </a:rPr>
-              <a:t>Identify the structure: Identify the domain and retrieve the relevant representation or method.</a:t>
+              <a:t>0.72, 7/10, 73%</a:t>
             </a:r>
           </a:p>
         </p:txBody>
@@ -8411,28 +8413,30 @@
           <p:cNvPr id="14" name="">
             <a:extLst xmlns:a="http://schemas.openxmlformats.org/drawingml/2006/main">
               <a:ext uri="{FF2B5EF4-FFF2-40B4-BE49-F238E27FC236}">
-                <a16:creationId xmlns:a16="http://schemas.microsoft.com/office/drawing/2014/main" id="{7CCC60A3-FAD0-4CF6-888E-1FDAA26C61FA}"/>
-              </a:ext>
-            </a:extLst>
-          </p:cNvPr>
-          <p:cNvSpPr>
-            <a:spLocks xmlns:a="http://schemas.openxmlformats.org/drawingml/2006/main" noGrp="1"/>
-          </p:cNvSpPr>
-          <p:nvPr/>
-        </p:nvSpPr>
-        <p:spPr>
-          <a:xfrm xmlns:a="http://schemas.openxmlformats.org/drawingml/2006/main">
-            <a:off x="1000125" y="2990850"/>
-            <a:ext cx="476250" cy="476250"/>
-          </a:xfrm>
-          <a:prstGeom xmlns:a="http://schemas.openxmlformats.org/drawingml/2006/main" prst="ellipse">
+                <a16:creationId xmlns:a16="http://schemas.microsoft.com/office/drawing/2014/main" id="{11592BCF-02BE-4651-A5F8-E983DE0365AA}"/>
+              </a:ext>
+            </a:extLst>
+          </p:cNvPr>
+          <p:cNvSpPr>
+            <a:spLocks xmlns:a="http://schemas.openxmlformats.org/drawingml/2006/main" noGrp="1"/>
+          </p:cNvSpPr>
+          <p:nvPr/>
+        </p:nvSpPr>
+        <p:spPr>
+          <a:xfrm xmlns:a="http://schemas.openxmlformats.org/drawingml/2006/main">
+            <a:off x="1714500" y="2771775"/>
+            <a:ext cx="9334500" cy="9525"/>
+          </a:xfrm>
+          <a:prstGeom xmlns:a="http://schemas.openxmlformats.org/drawingml/2006/main" prst="rect">
             <a:avLst/>
           </a:prstGeom>
           <a:solidFill xmlns:a="http://schemas.openxmlformats.org/drawingml/2006/main">
-            <a:srgbClr val="2C6E73"/>
+            <a:srgbClr val="D9E0E6"/>
           </a:solidFill>
           <a:ln xmlns:a="http://schemas.openxmlformats.org/drawingml/2006/main" w="0">
-            <a:noFill/>
+            <a:solidFill>
+              <a:srgbClr val="D9E0E6"/>
+            </a:solidFill>
           </a:ln>
         </p:spPr>
       </p:sp>
@@ -8441,19 +8445,19 @@
           <p:cNvPr id="15" name="">
             <a:extLst xmlns:a="http://schemas.openxmlformats.org/drawingml/2006/main">
               <a:ext uri="{FF2B5EF4-FFF2-40B4-BE49-F238E27FC236}">
-                <a16:creationId xmlns:a16="http://schemas.microsoft.com/office/drawing/2014/main" id="{C91F6091-D70B-409D-BE3A-B4C4312122BF}"/>
-              </a:ext>
-            </a:extLst>
-          </p:cNvPr>
-          <p:cNvSpPr>
-            <a:spLocks xmlns:a="http://schemas.openxmlformats.org/drawingml/2006/main" noGrp="1"/>
-          </p:cNvSpPr>
-          <p:nvPr/>
-        </p:nvSpPr>
-        <p:spPr>
-          <a:xfrm xmlns:a="http://schemas.openxmlformats.org/drawingml/2006/main">
-            <a:off x="1000125" y="3019425"/>
-            <a:ext cx="476250" cy="419100"/>
+                <a16:creationId xmlns:a16="http://schemas.microsoft.com/office/drawing/2014/main" id="{611FE316-98C8-4514-8749-D193A5FECA7F}"/>
+              </a:ext>
+            </a:extLst>
+          </p:cNvPr>
+          <p:cNvSpPr>
+            <a:spLocks xmlns:a="http://schemas.openxmlformats.org/drawingml/2006/main" noGrp="1"/>
+          </p:cNvSpPr>
+          <p:nvPr/>
+        </p:nvSpPr>
+        <p:spPr>
+          <a:xfrm xmlns:a="http://schemas.openxmlformats.org/drawingml/2006/main">
+            <a:off x="1162050" y="2905125"/>
+            <a:ext cx="400050" cy="400050"/>
           </a:xfrm>
           <a:prstGeom xmlns:a="http://schemas.openxmlformats.org/drawingml/2006/main" prst="rect">
             <a:avLst/>
@@ -8470,9 +8474,9 @@
           <a:lstStyle xmlns:a="http://schemas.openxmlformats.org/drawingml/2006/main"/>
           <a:p xmlns:a="http://schemas.openxmlformats.org/drawingml/2006/main">
             <a:pPr algn="ctr">
-              <a:defRPr sz="1350" b="1">
-                <a:solidFill>
-                  <a:srgbClr val="FFFFFF"/>
+              <a:defRPr sz="1125" b="1">
+                <a:solidFill>
+                  <a:srgbClr val="2C6E73"/>
                 </a:solidFill>
                 <a:latin typeface="Arial"/>
                 <a:ea typeface="Arial"/>
@@ -8480,9 +8484,9 @@
               </a:defRPr>
             </a:pPr>
             <a:r>
-              <a:rPr sz="1350" b="1">
-                <a:solidFill>
-                  <a:srgbClr val="FFFFFF"/>
+              <a:rPr sz="1125" b="1">
+                <a:solidFill>
+                  <a:srgbClr val="2C6E73"/>
                 </a:solidFill>
                 <a:latin typeface="Arial"/>
                 <a:ea typeface="Arial"/>
@@ -8498,19 +8502,19 @@
           <p:cNvPr id="16" name="">
             <a:extLst xmlns:a="http://schemas.openxmlformats.org/drawingml/2006/main">
               <a:ext uri="{FF2B5EF4-FFF2-40B4-BE49-F238E27FC236}">
-                <a16:creationId xmlns:a16="http://schemas.microsoft.com/office/drawing/2014/main" id="{96569D7D-5E66-438B-8E2E-BC38B6C6DC97}"/>
-              </a:ext>
-            </a:extLst>
-          </p:cNvPr>
-          <p:cNvSpPr>
-            <a:spLocks xmlns:a="http://schemas.openxmlformats.org/drawingml/2006/main" noGrp="1"/>
-          </p:cNvSpPr>
-          <p:nvPr/>
-        </p:nvSpPr>
-        <p:spPr>
-          <a:xfrm xmlns:a="http://schemas.openxmlformats.org/drawingml/2006/main">
-            <a:off x="1714500" y="2924175"/>
-            <a:ext cx="9429750" cy="609600"/>
+                <a16:creationId xmlns:a16="http://schemas.microsoft.com/office/drawing/2014/main" id="{A6D3D482-185B-4070-8DC6-CC4B135D57A6}"/>
+              </a:ext>
+            </a:extLst>
+          </p:cNvPr>
+          <p:cNvSpPr>
+            <a:spLocks xmlns:a="http://schemas.openxmlformats.org/drawingml/2006/main" noGrp="1"/>
+          </p:cNvSpPr>
+          <p:nvPr/>
+        </p:nvSpPr>
+        <p:spPr>
+          <a:xfrm xmlns:a="http://schemas.openxmlformats.org/drawingml/2006/main">
+            <a:off x="1714500" y="2819400"/>
+            <a:ext cx="9525000" cy="638175"/>
           </a:xfrm>
           <a:prstGeom xmlns:a="http://schemas.openxmlformats.org/drawingml/2006/main" prst="rect">
             <a:avLst/>
@@ -8527,7 +8531,7 @@
           <a:lstStyle xmlns:a="http://schemas.openxmlformats.org/drawingml/2006/main"/>
           <a:p xmlns:a="http://schemas.openxmlformats.org/drawingml/2006/main">
             <a:pPr algn="l">
-              <a:defRPr sz="1500" b="0">
+              <a:defRPr sz="1575" b="0">
                 <a:solidFill>
                   <a:srgbClr val="17253A"/>
                 </a:solidFill>
@@ -8537,7 +8541,7 @@
               </a:defRPr>
             </a:pPr>
             <a:r>
-              <a:rPr sz="1500" b="0">
+              <a:rPr sz="1575" b="0">
                 <a:solidFill>
                   <a:srgbClr val="17253A"/>
                 </a:solidFill>
@@ -8545,7 +8549,7 @@
                 <a:ea typeface="Arial"/>
                 <a:cs typeface="Arial"/>
               </a:rPr>
-              <a:t>Set up the method: Show a complete calculation with precise vocabulary.</a:t>
+              <a:t>7/10 = 0.70</a:t>
             </a:r>
           </a:p>
         </p:txBody>
@@ -8555,28 +8559,30 @@
           <p:cNvPr id="17" name="">
             <a:extLst xmlns:a="http://schemas.openxmlformats.org/drawingml/2006/main">
               <a:ext uri="{FF2B5EF4-FFF2-40B4-BE49-F238E27FC236}">
-                <a16:creationId xmlns:a16="http://schemas.microsoft.com/office/drawing/2014/main" id="{4F422ECB-207D-454B-9A2F-A8D28741CC73}"/>
-              </a:ext>
-            </a:extLst>
-          </p:cNvPr>
-          <p:cNvSpPr>
-            <a:spLocks xmlns:a="http://schemas.openxmlformats.org/drawingml/2006/main" noGrp="1"/>
-          </p:cNvSpPr>
-          <p:nvPr/>
-        </p:nvSpPr>
-        <p:spPr>
-          <a:xfrm xmlns:a="http://schemas.openxmlformats.org/drawingml/2006/main">
-            <a:off x="1000125" y="3733800"/>
-            <a:ext cx="476250" cy="476250"/>
-          </a:xfrm>
-          <a:prstGeom xmlns:a="http://schemas.openxmlformats.org/drawingml/2006/main" prst="ellipse">
+                <a16:creationId xmlns:a16="http://schemas.microsoft.com/office/drawing/2014/main" id="{4E997872-E520-4836-82BD-76180124E42D}"/>
+              </a:ext>
+            </a:extLst>
+          </p:cNvPr>
+          <p:cNvSpPr>
+            <a:spLocks xmlns:a="http://schemas.openxmlformats.org/drawingml/2006/main" noGrp="1"/>
+          </p:cNvSpPr>
+          <p:nvPr/>
+        </p:nvSpPr>
+        <p:spPr>
+          <a:xfrm xmlns:a="http://schemas.openxmlformats.org/drawingml/2006/main">
+            <a:off x="1714500" y="3476625"/>
+            <a:ext cx="9334500" cy="9525"/>
+          </a:xfrm>
+          <a:prstGeom xmlns:a="http://schemas.openxmlformats.org/drawingml/2006/main" prst="rect">
             <a:avLst/>
           </a:prstGeom>
           <a:solidFill xmlns:a="http://schemas.openxmlformats.org/drawingml/2006/main">
-            <a:srgbClr val="2C6E73"/>
+            <a:srgbClr val="D9E0E6"/>
           </a:solidFill>
           <a:ln xmlns:a="http://schemas.openxmlformats.org/drawingml/2006/main" w="0">
-            <a:noFill/>
+            <a:solidFill>
+              <a:srgbClr val="D9E0E6"/>
+            </a:solidFill>
           </a:ln>
         </p:spPr>
       </p:sp>
@@ -8585,19 +8591,19 @@
           <p:cNvPr id="18" name="">
             <a:extLst xmlns:a="http://schemas.openxmlformats.org/drawingml/2006/main">
               <a:ext uri="{FF2B5EF4-FFF2-40B4-BE49-F238E27FC236}">
-                <a16:creationId xmlns:a16="http://schemas.microsoft.com/office/drawing/2014/main" id="{94FA1814-9A48-4E79-9CD7-FAFEF124EEA0}"/>
-              </a:ext>
-            </a:extLst>
-          </p:cNvPr>
-          <p:cNvSpPr>
-            <a:spLocks xmlns:a="http://schemas.openxmlformats.org/drawingml/2006/main" noGrp="1"/>
-          </p:cNvSpPr>
-          <p:nvPr/>
-        </p:nvSpPr>
-        <p:spPr>
-          <a:xfrm xmlns:a="http://schemas.openxmlformats.org/drawingml/2006/main">
-            <a:off x="1000125" y="3762375"/>
-            <a:ext cx="476250" cy="419100"/>
+                <a16:creationId xmlns:a16="http://schemas.microsoft.com/office/drawing/2014/main" id="{F8F2C0E1-C14E-4245-A030-31C1CDA8216C}"/>
+              </a:ext>
+            </a:extLst>
+          </p:cNvPr>
+          <p:cNvSpPr>
+            <a:spLocks xmlns:a="http://schemas.openxmlformats.org/drawingml/2006/main" noGrp="1"/>
+          </p:cNvSpPr>
+          <p:nvPr/>
+        </p:nvSpPr>
+        <p:spPr>
+          <a:xfrm xmlns:a="http://schemas.openxmlformats.org/drawingml/2006/main">
+            <a:off x="1162050" y="3609975"/>
+            <a:ext cx="400050" cy="400050"/>
           </a:xfrm>
           <a:prstGeom xmlns:a="http://schemas.openxmlformats.org/drawingml/2006/main" prst="rect">
             <a:avLst/>
@@ -8614,9 +8620,9 @@
           <a:lstStyle xmlns:a="http://schemas.openxmlformats.org/drawingml/2006/main"/>
           <a:p xmlns:a="http://schemas.openxmlformats.org/drawingml/2006/main">
             <a:pPr algn="ctr">
-              <a:defRPr sz="1350" b="1">
-                <a:solidFill>
-                  <a:srgbClr val="FFFFFF"/>
+              <a:defRPr sz="1125" b="1">
+                <a:solidFill>
+                  <a:srgbClr val="2C6E73"/>
                 </a:solidFill>
                 <a:latin typeface="Arial"/>
                 <a:ea typeface="Arial"/>
@@ -8624,9 +8630,9 @@
               </a:defRPr>
             </a:pPr>
             <a:r>
-              <a:rPr sz="1350" b="1">
-                <a:solidFill>
-                  <a:srgbClr val="FFFFFF"/>
+              <a:rPr sz="1125" b="1">
+                <a:solidFill>
+                  <a:srgbClr val="2C6E73"/>
                 </a:solidFill>
                 <a:latin typeface="Arial"/>
                 <a:ea typeface="Arial"/>
@@ -8642,19 +8648,19 @@
           <p:cNvPr id="19" name="">
             <a:extLst xmlns:a="http://schemas.openxmlformats.org/drawingml/2006/main">
               <a:ext uri="{FF2B5EF4-FFF2-40B4-BE49-F238E27FC236}">
-                <a16:creationId xmlns:a16="http://schemas.microsoft.com/office/drawing/2014/main" id="{6ECA2AFB-C7CF-4221-8646-2A18C32F3F3C}"/>
-              </a:ext>
-            </a:extLst>
-          </p:cNvPr>
-          <p:cNvSpPr>
-            <a:spLocks xmlns:a="http://schemas.openxmlformats.org/drawingml/2006/main" noGrp="1"/>
-          </p:cNvSpPr>
-          <p:nvPr/>
-        </p:nvSpPr>
-        <p:spPr>
-          <a:xfrm xmlns:a="http://schemas.openxmlformats.org/drawingml/2006/main">
-            <a:off x="1714500" y="3667125"/>
-            <a:ext cx="9429750" cy="609600"/>
+                <a16:creationId xmlns:a16="http://schemas.microsoft.com/office/drawing/2014/main" id="{9A64A23D-D269-4294-9C0D-130B9B85DF2A}"/>
+              </a:ext>
+            </a:extLst>
+          </p:cNvPr>
+          <p:cNvSpPr>
+            <a:spLocks xmlns:a="http://schemas.openxmlformats.org/drawingml/2006/main" noGrp="1"/>
+          </p:cNvSpPr>
+          <p:nvPr/>
+        </p:nvSpPr>
+        <p:spPr>
+          <a:xfrm xmlns:a="http://schemas.openxmlformats.org/drawingml/2006/main">
+            <a:off x="1714500" y="3524250"/>
+            <a:ext cx="9525000" cy="638175"/>
           </a:xfrm>
           <a:prstGeom xmlns:a="http://schemas.openxmlformats.org/drawingml/2006/main" prst="rect">
             <a:avLst/>
@@ -8671,7 +8677,7 @@
           <a:lstStyle xmlns:a="http://schemas.openxmlformats.org/drawingml/2006/main"/>
           <a:p xmlns:a="http://schemas.openxmlformats.org/drawingml/2006/main">
             <a:pPr algn="l">
-              <a:defRPr sz="1500" b="0">
+              <a:defRPr sz="1575" b="0">
                 <a:solidFill>
                   <a:srgbClr val="17253A"/>
                 </a:solidFill>
@@ -8681,7 +8687,7 @@
               </a:defRPr>
             </a:pPr>
             <a:r>
-              <a:rPr sz="1500" b="0">
+              <a:rPr sz="1575" b="0">
                 <a:solidFill>
                   <a:srgbClr val="17253A"/>
                 </a:solidFill>
@@ -8689,7 +8695,7 @@
                 <a:ea typeface="Arial"/>
                 <a:cs typeface="Arial"/>
               </a:rPr>
-              <a:t>Complete the calculation: 7/10, 0.72, 73%.</a:t>
+              <a:t>73% = 0.73</a:t>
             </a:r>
           </a:p>
         </p:txBody>
@@ -8699,28 +8705,30 @@
           <p:cNvPr id="20" name="">
             <a:extLst xmlns:a="http://schemas.openxmlformats.org/drawingml/2006/main">
               <a:ext uri="{FF2B5EF4-FFF2-40B4-BE49-F238E27FC236}">
-                <a16:creationId xmlns:a16="http://schemas.microsoft.com/office/drawing/2014/main" id="{05A4E51B-2D54-47A4-AF32-70BE1C9725C0}"/>
-              </a:ext>
-            </a:extLst>
-          </p:cNvPr>
-          <p:cNvSpPr>
-            <a:spLocks xmlns:a="http://schemas.openxmlformats.org/drawingml/2006/main" noGrp="1"/>
-          </p:cNvSpPr>
-          <p:nvPr/>
-        </p:nvSpPr>
-        <p:spPr>
-          <a:xfrm xmlns:a="http://schemas.openxmlformats.org/drawingml/2006/main">
-            <a:off x="1000125" y="4476750"/>
-            <a:ext cx="476250" cy="476250"/>
-          </a:xfrm>
-          <a:prstGeom xmlns:a="http://schemas.openxmlformats.org/drawingml/2006/main" prst="ellipse">
+                <a16:creationId xmlns:a16="http://schemas.microsoft.com/office/drawing/2014/main" id="{41E4B879-4A25-4A90-AD68-FD006E3241A9}"/>
+              </a:ext>
+            </a:extLst>
+          </p:cNvPr>
+          <p:cNvSpPr>
+            <a:spLocks xmlns:a="http://schemas.openxmlformats.org/drawingml/2006/main" noGrp="1"/>
+          </p:cNvSpPr>
+          <p:nvPr/>
+        </p:nvSpPr>
+        <p:spPr>
+          <a:xfrm xmlns:a="http://schemas.openxmlformats.org/drawingml/2006/main">
+            <a:off x="1714500" y="4181475"/>
+            <a:ext cx="9334500" cy="9525"/>
+          </a:xfrm>
+          <a:prstGeom xmlns:a="http://schemas.openxmlformats.org/drawingml/2006/main" prst="rect">
             <a:avLst/>
           </a:prstGeom>
           <a:solidFill xmlns:a="http://schemas.openxmlformats.org/drawingml/2006/main">
-            <a:srgbClr val="2C6E73"/>
+            <a:srgbClr val="D9E0E6"/>
           </a:solidFill>
           <a:ln xmlns:a="http://schemas.openxmlformats.org/drawingml/2006/main" w="0">
-            <a:noFill/>
+            <a:solidFill>
+              <a:srgbClr val="D9E0E6"/>
+            </a:solidFill>
           </a:ln>
         </p:spPr>
       </p:sp>
@@ -8729,19 +8737,19 @@
           <p:cNvPr id="21" name="">
             <a:extLst xmlns:a="http://schemas.openxmlformats.org/drawingml/2006/main">
               <a:ext uri="{FF2B5EF4-FFF2-40B4-BE49-F238E27FC236}">
-                <a16:creationId xmlns:a16="http://schemas.microsoft.com/office/drawing/2014/main" id="{9A805A44-F5DC-40C9-BFCF-5773E485C3FD}"/>
-              </a:ext>
-            </a:extLst>
-          </p:cNvPr>
-          <p:cNvSpPr>
-            <a:spLocks xmlns:a="http://schemas.openxmlformats.org/drawingml/2006/main" noGrp="1"/>
-          </p:cNvSpPr>
-          <p:nvPr/>
-        </p:nvSpPr>
-        <p:spPr>
-          <a:xfrm xmlns:a="http://schemas.openxmlformats.org/drawingml/2006/main">
-            <a:off x="1000125" y="4505325"/>
-            <a:ext cx="476250" cy="419100"/>
+                <a16:creationId xmlns:a16="http://schemas.microsoft.com/office/drawing/2014/main" id="{5E32E13D-DF69-4096-9666-C75AB9062845}"/>
+              </a:ext>
+            </a:extLst>
+          </p:cNvPr>
+          <p:cNvSpPr>
+            <a:spLocks xmlns:a="http://schemas.openxmlformats.org/drawingml/2006/main" noGrp="1"/>
+          </p:cNvSpPr>
+          <p:nvPr/>
+        </p:nvSpPr>
+        <p:spPr>
+          <a:xfrm xmlns:a="http://schemas.openxmlformats.org/drawingml/2006/main">
+            <a:off x="1162050" y="4314825"/>
+            <a:ext cx="400050" cy="400050"/>
           </a:xfrm>
           <a:prstGeom xmlns:a="http://schemas.openxmlformats.org/drawingml/2006/main" prst="rect">
             <a:avLst/>
@@ -8758,9 +8766,9 @@
           <a:lstStyle xmlns:a="http://schemas.openxmlformats.org/drawingml/2006/main"/>
           <a:p xmlns:a="http://schemas.openxmlformats.org/drawingml/2006/main">
             <a:pPr algn="ctr">
-              <a:defRPr sz="1350" b="1">
-                <a:solidFill>
-                  <a:srgbClr val="FFFFFF"/>
+              <a:defRPr sz="1125" b="1">
+                <a:solidFill>
+                  <a:srgbClr val="2C6E73"/>
                 </a:solidFill>
                 <a:latin typeface="Arial"/>
                 <a:ea typeface="Arial"/>
@@ -8768,9 +8776,9 @@
               </a:defRPr>
             </a:pPr>
             <a:r>
-              <a:rPr sz="1350" b="1">
-                <a:solidFill>
-                  <a:srgbClr val="FFFFFF"/>
+              <a:rPr sz="1125" b="1">
+                <a:solidFill>
+                  <a:srgbClr val="2C6E73"/>
                 </a:solidFill>
                 <a:latin typeface="Arial"/>
                 <a:ea typeface="Arial"/>
@@ -8786,19 +8794,19 @@
           <p:cNvPr id="22" name="">
             <a:extLst xmlns:a="http://schemas.openxmlformats.org/drawingml/2006/main">
               <a:ext uri="{FF2B5EF4-FFF2-40B4-BE49-F238E27FC236}">
-                <a16:creationId xmlns:a16="http://schemas.microsoft.com/office/drawing/2014/main" id="{66FD39F2-222A-410E-B01F-67D4A6568F01}"/>
-              </a:ext>
-            </a:extLst>
-          </p:cNvPr>
-          <p:cNvSpPr>
-            <a:spLocks xmlns:a="http://schemas.openxmlformats.org/drawingml/2006/main" noGrp="1"/>
-          </p:cNvSpPr>
-          <p:nvPr/>
-        </p:nvSpPr>
-        <p:spPr>
-          <a:xfrm xmlns:a="http://schemas.openxmlformats.org/drawingml/2006/main">
-            <a:off x="1714500" y="4410075"/>
-            <a:ext cx="9429750" cy="609600"/>
+                <a16:creationId xmlns:a16="http://schemas.microsoft.com/office/drawing/2014/main" id="{2658D6FB-7ED3-4889-8FB4-C5EDA16E500F}"/>
+              </a:ext>
+            </a:extLst>
+          </p:cNvPr>
+          <p:cNvSpPr>
+            <a:spLocks xmlns:a="http://schemas.openxmlformats.org/drawingml/2006/main" noGrp="1"/>
+          </p:cNvSpPr>
+          <p:nvPr/>
+        </p:nvSpPr>
+        <p:spPr>
+          <a:xfrm xmlns:a="http://schemas.openxmlformats.org/drawingml/2006/main">
+            <a:off x="1714500" y="4229100"/>
+            <a:ext cx="9525000" cy="638175"/>
           </a:xfrm>
           <a:prstGeom xmlns:a="http://schemas.openxmlformats.org/drawingml/2006/main" prst="rect">
             <a:avLst/>
@@ -8815,9 +8823,9 @@
           <a:lstStyle xmlns:a="http://schemas.openxmlformats.org/drawingml/2006/main"/>
           <a:p xmlns:a="http://schemas.openxmlformats.org/drawingml/2006/main">
             <a:pPr algn="l">
-              <a:defRPr sz="1500" b="1">
-                <a:solidFill>
-                  <a:srgbClr val="2F785D"/>
+              <a:defRPr sz="1575" b="0">
+                <a:solidFill>
+                  <a:srgbClr val="17253A"/>
                 </a:solidFill>
                 <a:latin typeface="Arial"/>
                 <a:ea typeface="Arial"/>
@@ -8825,15 +8833,161 @@
               </a:defRPr>
             </a:pPr>
             <a:r>
-              <a:rPr sz="1500" b="1">
+              <a:rPr sz="1575" b="0">
+                <a:solidFill>
+                  <a:srgbClr val="17253A"/>
+                </a:solidFill>
+                <a:latin typeface="Arial"/>
+                <a:ea typeface="Arial"/>
+                <a:cs typeface="Arial"/>
+              </a:rPr>
+              <a:t>0.70 &lt; 0.72 &lt; 0.73</a:t>
+            </a:r>
+          </a:p>
+        </p:txBody>
+      </p:sp>
+      <p:sp>
+        <p:nvSpPr>
+          <p:cNvPr id="23" name="">
+            <a:extLst xmlns:a="http://schemas.openxmlformats.org/drawingml/2006/main">
+              <a:ext uri="{FF2B5EF4-FFF2-40B4-BE49-F238E27FC236}">
+                <a16:creationId xmlns:a16="http://schemas.microsoft.com/office/drawing/2014/main" id="{E8EE3779-4519-4A08-B834-CB5CBF5E80BE}"/>
+              </a:ext>
+            </a:extLst>
+          </p:cNvPr>
+          <p:cNvSpPr>
+            <a:spLocks xmlns:a="http://schemas.openxmlformats.org/drawingml/2006/main" noGrp="1"/>
+          </p:cNvSpPr>
+          <p:nvPr/>
+        </p:nvSpPr>
+        <p:spPr>
+          <a:xfrm xmlns:a="http://schemas.openxmlformats.org/drawingml/2006/main">
+            <a:off x="1714500" y="4886325"/>
+            <a:ext cx="9334500" cy="9525"/>
+          </a:xfrm>
+          <a:prstGeom xmlns:a="http://schemas.openxmlformats.org/drawingml/2006/main" prst="rect">
+            <a:avLst/>
+          </a:prstGeom>
+          <a:solidFill xmlns:a="http://schemas.openxmlformats.org/drawingml/2006/main">
+            <a:srgbClr val="D9E0E6"/>
+          </a:solidFill>
+          <a:ln xmlns:a="http://schemas.openxmlformats.org/drawingml/2006/main" w="0">
+            <a:solidFill>
+              <a:srgbClr val="D9E0E6"/>
+            </a:solidFill>
+          </a:ln>
+        </p:spPr>
+      </p:sp>
+      <p:sp>
+        <p:nvSpPr>
+          <p:cNvPr id="24" name="">
+            <a:extLst xmlns:a="http://schemas.openxmlformats.org/drawingml/2006/main">
+              <a:ext uri="{FF2B5EF4-FFF2-40B4-BE49-F238E27FC236}">
+                <a16:creationId xmlns:a16="http://schemas.microsoft.com/office/drawing/2014/main" id="{9A656D35-0E80-4765-A615-804D1955224A}"/>
+              </a:ext>
+            </a:extLst>
+          </p:cNvPr>
+          <p:cNvSpPr>
+            <a:spLocks xmlns:a="http://schemas.openxmlformats.org/drawingml/2006/main" noGrp="1"/>
+          </p:cNvSpPr>
+          <p:nvPr/>
+        </p:nvSpPr>
+        <p:spPr>
+          <a:xfrm xmlns:a="http://schemas.openxmlformats.org/drawingml/2006/main">
+            <a:off x="1162050" y="5019675"/>
+            <a:ext cx="400050" cy="400050"/>
+          </a:xfrm>
+          <a:prstGeom xmlns:a="http://schemas.openxmlformats.org/drawingml/2006/main" prst="rect">
+            <a:avLst/>
+          </a:prstGeom>
+          <a:noFill xmlns:a="http://schemas.openxmlformats.org/drawingml/2006/main"/>
+          <a:ln xmlns:a="http://schemas.openxmlformats.org/drawingml/2006/main" w="0">
+            <a:noFill/>
+          </a:ln>
+        </p:spPr>
+        <p:txBody>
+          <a:bodyPr xmlns:a="http://schemas.openxmlformats.org/drawingml/2006/main" anchor="ctr">
+            <a:normAutofit fontScale="100000"/>
+          </a:bodyPr>
+          <a:lstStyle xmlns:a="http://schemas.openxmlformats.org/drawingml/2006/main"/>
+          <a:p xmlns:a="http://schemas.openxmlformats.org/drawingml/2006/main">
+            <a:pPr algn="ctr">
+              <a:defRPr sz="1125" b="1">
                 <a:solidFill>
                   <a:srgbClr val="2F785D"/>
                 </a:solidFill>
                 <a:latin typeface="Arial"/>
                 <a:ea typeface="Arial"/>
                 <a:cs typeface="Arial"/>
+              </a:defRPr>
+            </a:pPr>
+            <a:r>
+              <a:rPr sz="1125" b="1">
+                <a:solidFill>
+                  <a:srgbClr val="2F785D"/>
+                </a:solidFill>
+                <a:latin typeface="Arial"/>
+                <a:ea typeface="Arial"/>
+                <a:cs typeface="Arial"/>
               </a:rPr>
-              <a:t>Check the result: Check the result and record a specific next step.</a:t>
+              <a:t>5</a:t>
+            </a:r>
+          </a:p>
+        </p:txBody>
+      </p:sp>
+      <p:sp>
+        <p:nvSpPr>
+          <p:cNvPr id="25" name="">
+            <a:extLst xmlns:a="http://schemas.openxmlformats.org/drawingml/2006/main">
+              <a:ext uri="{FF2B5EF4-FFF2-40B4-BE49-F238E27FC236}">
+                <a16:creationId xmlns:a16="http://schemas.microsoft.com/office/drawing/2014/main" id="{C039555E-A5E0-4E84-AE7F-5CFA36BD2C24}"/>
+              </a:ext>
+            </a:extLst>
+          </p:cNvPr>
+          <p:cNvSpPr>
+            <a:spLocks xmlns:a="http://schemas.openxmlformats.org/drawingml/2006/main" noGrp="1"/>
+          </p:cNvSpPr>
+          <p:nvPr/>
+        </p:nvSpPr>
+        <p:spPr>
+          <a:xfrm xmlns:a="http://schemas.openxmlformats.org/drawingml/2006/main">
+            <a:off x="1714500" y="4933950"/>
+            <a:ext cx="9525000" cy="638175"/>
+          </a:xfrm>
+          <a:prstGeom xmlns:a="http://schemas.openxmlformats.org/drawingml/2006/main" prst="rect">
+            <a:avLst/>
+          </a:prstGeom>
+          <a:noFill xmlns:a="http://schemas.openxmlformats.org/drawingml/2006/main"/>
+          <a:ln xmlns:a="http://schemas.openxmlformats.org/drawingml/2006/main" w="0">
+            <a:noFill/>
+          </a:ln>
+        </p:spPr>
+        <p:txBody>
+          <a:bodyPr xmlns:a="http://schemas.openxmlformats.org/drawingml/2006/main" anchor="ctr">
+            <a:normAutofit fontScale="100000"/>
+          </a:bodyPr>
+          <a:lstStyle xmlns:a="http://schemas.openxmlformats.org/drawingml/2006/main"/>
+          <a:p xmlns:a="http://schemas.openxmlformats.org/drawingml/2006/main">
+            <a:pPr algn="l">
+              <a:defRPr sz="1575" b="1">
+                <a:solidFill>
+                  <a:srgbClr val="2F785D"/>
+                </a:solidFill>
+                <a:latin typeface="Arial"/>
+                <a:ea typeface="Arial"/>
+                <a:cs typeface="Arial"/>
+              </a:defRPr>
+            </a:pPr>
+            <a:r>
+              <a:rPr sz="1575" b="1">
+                <a:solidFill>
+                  <a:srgbClr val="2F785D"/>
+                </a:solidFill>
+                <a:latin typeface="Arial"/>
+                <a:ea typeface="Arial"/>
+                <a:cs typeface="Arial"/>
+              </a:rPr>
+              <a:t>7/10, 0.72, 73%</a:t>
             </a:r>
           </a:p>
         </p:txBody>
@@ -8841,7 +8995,7 @@
     </p:spTree>
     <p:extLst>
       <p:ext uri="{BB962C8B-B14F-4D97-AF65-F5344CB8AC3E}">
-        <p14:creationId xmlns:p14="http://schemas.microsoft.com/office/powerpoint/2010/main" val="1877374338"/>
+        <p14:creationId xmlns:p14="http://schemas.microsoft.com/office/powerpoint/2010/main" val="2019542955"/>
       </p:ext>
     </p:extLst>
   </p:cSld>
@@ -9078,6 +9232,51 @@
                       </p:childTnLst>
                     </p:cTn>
                   </p:par>
+                  <p:par>
+                    <p:cTn id="23" fill="hold">
+                      <p:stCondLst>
+                        <p:cond delay="indefinite"/>
+                      </p:stCondLst>
+                      <p:childTnLst>
+                        <p:par>
+                          <p:cTn id="24" fill="hold">
+                            <p:stCondLst>
+                              <p:cond delay="0"/>
+                            </p:stCondLst>
+                            <p:childTnLst>
+                              <p:par>
+                                <p:cTn id="25" presetID="1" presetClass="entr" presetSubtype="0" fill="hold" grpId="0" nodeType="clickEffect">
+                                  <p:stCondLst>
+                                    <p:cond delay="0"/>
+                                  </p:stCondLst>
+                                  <p:childTnLst>
+                                    <p:set>
+                                      <p:cBhvr>
+                                        <p:cTn id="26" dur="1" fill="hold">
+                                          <p:stCondLst>
+                                            <p:cond delay="0"/>
+                                          </p:stCondLst>
+                                        </p:cTn>
+                                        <p:tgtEl>
+                                          <p:spTgt spid="25"/>
+                                        </p:tgtEl>
+                                        <p:attrNameLst>
+                                          <p:attrName>style.visibility</p:attrName>
+                                        </p:attrNameLst>
+                                      </p:cBhvr>
+                                      <p:to>
+                                        <p:strVal val="visible"/>
+                                      </p:to>
+                                    </p:set>
+                                  </p:childTnLst>
+                                </p:cTn>
+                              </p:par>
+                            </p:childTnLst>
+                          </p:cTn>
+                        </p:par>
+                      </p:childTnLst>
+                    </p:cTn>
+                  </p:par>
                 </p:childTnLst>
               </p:cTn>
               <p:prevCondLst>
@@ -9105,6 +9304,7 @@
       <p:bldP spid="16" grpId="0"/>
       <p:bldP spid="19" grpId="0"/>
       <p:bldP spid="22" grpId="0"/>
+      <p:bldP spid="25" grpId="0"/>
     </p:bldLst>
   </p:timing>
 </p:sld>
@@ -9134,7 +9334,7 @@
           <p:cNvPr id="15" name="">
             <a:extLst xmlns:a="http://schemas.openxmlformats.org/drawingml/2006/main">
               <a:ext uri="{FF2B5EF4-FFF2-40B4-BE49-F238E27FC236}">
-                <a16:creationId xmlns:a16="http://schemas.microsoft.com/office/drawing/2014/main" id="{8822DB30-2918-4CB3-9FA6-E35F7DF7BC6F}"/>
+                <a16:creationId xmlns:a16="http://schemas.microsoft.com/office/drawing/2014/main" id="{AC3D231D-3C24-436B-8460-26C223BEACF3}"/>
               </a:ext>
             </a:extLst>
           </p:cNvPr>
@@ -9166,7 +9366,7 @@
           <p:cNvPr id="2" name="">
             <a:extLst xmlns:a="http://schemas.openxmlformats.org/drawingml/2006/main">
               <a:ext uri="{FF2B5EF4-FFF2-40B4-BE49-F238E27FC236}">
-                <a16:creationId xmlns:a16="http://schemas.microsoft.com/office/drawing/2014/main" id="{E8D8487B-7FC3-42FF-9265-0C283556B5C6}"/>
+                <a16:creationId xmlns:a16="http://schemas.microsoft.com/office/drawing/2014/main" id="{688773EE-F00A-469A-B036-EA97DF4FCFE3}"/>
               </a:ext>
             </a:extLst>
           </p:cNvPr>
@@ -9223,7 +9423,7 @@
           <p:cNvPr id="3" name="">
             <a:extLst xmlns:a="http://schemas.openxmlformats.org/drawingml/2006/main">
               <a:ext uri="{FF2B5EF4-FFF2-40B4-BE49-F238E27FC236}">
-                <a16:creationId xmlns:a16="http://schemas.microsoft.com/office/drawing/2014/main" id="{5371F261-90C7-491D-91B2-A03D0CF1B5F3}"/>
+                <a16:creationId xmlns:a16="http://schemas.microsoft.com/office/drawing/2014/main" id="{170EE244-72B5-4E7D-92CF-24705F40A9C8}"/>
               </a:ext>
             </a:extLst>
           </p:cNvPr>
@@ -9255,7 +9455,7 @@
           <p:cNvPr id="4" name="">
             <a:extLst xmlns:a="http://schemas.openxmlformats.org/drawingml/2006/main">
               <a:ext uri="{FF2B5EF4-FFF2-40B4-BE49-F238E27FC236}">
-                <a16:creationId xmlns:a16="http://schemas.microsoft.com/office/drawing/2014/main" id="{6C6BF1C1-51CC-4507-A212-E415123A464E}"/>
+                <a16:creationId xmlns:a16="http://schemas.microsoft.com/office/drawing/2014/main" id="{88C1037A-1C59-40CF-A281-975DE1BDCA41}"/>
               </a:ext>
             </a:extLst>
           </p:cNvPr>
@@ -9312,7 +9512,7 @@
           <p:cNvPr id="5" name="">
             <a:extLst xmlns:a="http://schemas.openxmlformats.org/drawingml/2006/main">
               <a:ext uri="{FF2B5EF4-FFF2-40B4-BE49-F238E27FC236}">
-                <a16:creationId xmlns:a16="http://schemas.microsoft.com/office/drawing/2014/main" id="{67412E9F-5743-4661-94AF-EB46F39EF7E0}"/>
+                <a16:creationId xmlns:a16="http://schemas.microsoft.com/office/drawing/2014/main" id="{3C042A01-D3CD-464F-9E9E-C0E712E88256}"/>
               </a:ext>
             </a:extLst>
           </p:cNvPr>
@@ -9369,7 +9569,7 @@
           <p:cNvPr id="6" name="">
             <a:extLst xmlns:a="http://schemas.openxmlformats.org/drawingml/2006/main">
               <a:ext uri="{FF2B5EF4-FFF2-40B4-BE49-F238E27FC236}">
-                <a16:creationId xmlns:a16="http://schemas.microsoft.com/office/drawing/2014/main" id="{2D6DBEF0-67CE-470B-8A28-0F88D29C917B}"/>
+                <a16:creationId xmlns:a16="http://schemas.microsoft.com/office/drawing/2014/main" id="{E28C1D80-3E3F-43C9-A832-E6DF21AB60DA}"/>
               </a:ext>
             </a:extLst>
           </p:cNvPr>
@@ -9426,7 +9626,7 @@
           <p:cNvPr id="7" name="">
             <a:extLst xmlns:a="http://schemas.openxmlformats.org/drawingml/2006/main">
               <a:ext uri="{FF2B5EF4-FFF2-40B4-BE49-F238E27FC236}">
-                <a16:creationId xmlns:a16="http://schemas.microsoft.com/office/drawing/2014/main" id="{675AF5CE-01B2-4700-BE76-AAC9399E985A}"/>
+                <a16:creationId xmlns:a16="http://schemas.microsoft.com/office/drawing/2014/main" id="{9CC4866B-1ACB-4C61-8D43-1C97064EAC71}"/>
               </a:ext>
             </a:extLst>
           </p:cNvPr>
@@ -9458,7 +9658,7 @@
           <p:cNvPr id="8" name="">
             <a:extLst xmlns:a="http://schemas.openxmlformats.org/drawingml/2006/main">
               <a:ext uri="{FF2B5EF4-FFF2-40B4-BE49-F238E27FC236}">
-                <a16:creationId xmlns:a16="http://schemas.microsoft.com/office/drawing/2014/main" id="{812B2DCE-6267-41DE-8A33-484D6B78F235}"/>
+                <a16:creationId xmlns:a16="http://schemas.microsoft.com/office/drawing/2014/main" id="{F8548C04-EAFE-467C-BCCC-46A307D287F4}"/>
               </a:ext>
             </a:extLst>
           </p:cNvPr>
@@ -9515,7 +9715,7 @@
           <p:cNvPr id="9" name="">
             <a:extLst xmlns:a="http://schemas.openxmlformats.org/drawingml/2006/main">
               <a:ext uri="{FF2B5EF4-FFF2-40B4-BE49-F238E27FC236}">
-                <a16:creationId xmlns:a16="http://schemas.microsoft.com/office/drawing/2014/main" id="{40AB96F2-5FB9-4401-BFE0-BF577F2A3F0E}"/>
+                <a16:creationId xmlns:a16="http://schemas.microsoft.com/office/drawing/2014/main" id="{207868A4-7966-475B-9116-6D8F9ECF1CAB}"/>
               </a:ext>
             </a:extLst>
           </p:cNvPr>
@@ -9572,7 +9772,7 @@
           <p:cNvPr id="10" name="">
             <a:extLst xmlns:a="http://schemas.openxmlformats.org/drawingml/2006/main">
               <a:ext uri="{FF2B5EF4-FFF2-40B4-BE49-F238E27FC236}">
-                <a16:creationId xmlns:a16="http://schemas.microsoft.com/office/drawing/2014/main" id="{4F3E8D99-52A1-4E1D-B66B-29D1209D9127}"/>
+                <a16:creationId xmlns:a16="http://schemas.microsoft.com/office/drawing/2014/main" id="{A11D3C05-73B1-4569-8420-1B0F63433D3F}"/>
               </a:ext>
             </a:extLst>
           </p:cNvPr>
@@ -9629,7 +9829,7 @@
           <p:cNvPr id="11" name="">
             <a:extLst xmlns:a="http://schemas.openxmlformats.org/drawingml/2006/main">
               <a:ext uri="{FF2B5EF4-FFF2-40B4-BE49-F238E27FC236}">
-                <a16:creationId xmlns:a16="http://schemas.microsoft.com/office/drawing/2014/main" id="{751489C6-6C17-4625-A2E2-A1DA4587F0DB}"/>
+                <a16:creationId xmlns:a16="http://schemas.microsoft.com/office/drawing/2014/main" id="{56C4D9A1-34A7-4ED2-AA8D-9FE90028138F}"/>
               </a:ext>
             </a:extLst>
           </p:cNvPr>
@@ -9686,7 +9886,7 @@
           <p:cNvPr id="12" name="">
             <a:extLst xmlns:a="http://schemas.openxmlformats.org/drawingml/2006/main">
               <a:ext uri="{FF2B5EF4-FFF2-40B4-BE49-F238E27FC236}">
-                <a16:creationId xmlns:a16="http://schemas.microsoft.com/office/drawing/2014/main" id="{8D6F98AD-ED5A-4411-BA0F-5C2DB24EF5C8}"/>
+                <a16:creationId xmlns:a16="http://schemas.microsoft.com/office/drawing/2014/main" id="{32C653B4-6CC9-4DE8-9C81-91ED6B16CB4C}"/>
               </a:ext>
             </a:extLst>
           </p:cNvPr>
@@ -9718,7 +9918,7 @@
           <p:cNvPr id="13" name="">
             <a:extLst xmlns:a="http://schemas.openxmlformats.org/drawingml/2006/main">
               <a:ext uri="{FF2B5EF4-FFF2-40B4-BE49-F238E27FC236}">
-                <a16:creationId xmlns:a16="http://schemas.microsoft.com/office/drawing/2014/main" id="{401E7DAF-EB96-4A68-A62C-582849D2E969}"/>
+                <a16:creationId xmlns:a16="http://schemas.microsoft.com/office/drawing/2014/main" id="{0CAE6F8B-E943-45C6-A083-9A41937B04C4}"/>
               </a:ext>
             </a:extLst>
           </p:cNvPr>
@@ -9775,7 +9975,7 @@
           <p:cNvPr id="14" name="">
             <a:extLst xmlns:a="http://schemas.openxmlformats.org/drawingml/2006/main">
               <a:ext uri="{FF2B5EF4-FFF2-40B4-BE49-F238E27FC236}">
-                <a16:creationId xmlns:a16="http://schemas.microsoft.com/office/drawing/2014/main" id="{5DD3AC84-FDB1-4A69-9450-281E4C442105}"/>
+                <a16:creationId xmlns:a16="http://schemas.microsoft.com/office/drawing/2014/main" id="{AAD23732-5A84-4812-8E68-3EB7E110A800}"/>
               </a:ext>
             </a:extLst>
           </p:cNvPr>
@@ -9830,7 +10030,7 @@
     </p:spTree>
     <p:extLst>
       <p:ext uri="{BB962C8B-B14F-4D97-AF65-F5344CB8AC3E}">
-        <p14:creationId xmlns:p14="http://schemas.microsoft.com/office/powerpoint/2010/main" val="1087311453"/>
+        <p14:creationId xmlns:p14="http://schemas.microsoft.com/office/powerpoint/2010/main" val="124639606"/>
       </p:ext>
     </p:extLst>
   </p:cSld>
@@ -10031,7 +10231,7 @@
           <p:cNvPr id="16" name="">
             <a:extLst xmlns:a="http://schemas.openxmlformats.org/drawingml/2006/main">
               <a:ext uri="{FF2B5EF4-FFF2-40B4-BE49-F238E27FC236}">
-                <a16:creationId xmlns:a16="http://schemas.microsoft.com/office/drawing/2014/main" id="{22057B80-0696-46FA-B47B-80D8D9AEE40B}"/>
+                <a16:creationId xmlns:a16="http://schemas.microsoft.com/office/drawing/2014/main" id="{C3BAA47A-40DA-401D-926F-6567078DFC45}"/>
               </a:ext>
             </a:extLst>
           </p:cNvPr>
@@ -10063,7 +10263,7 @@
           <p:cNvPr id="2" name="">
             <a:extLst xmlns:a="http://schemas.openxmlformats.org/drawingml/2006/main">
               <a:ext uri="{FF2B5EF4-FFF2-40B4-BE49-F238E27FC236}">
-                <a16:creationId xmlns:a16="http://schemas.microsoft.com/office/drawing/2014/main" id="{C52245A0-E94C-4202-A9A1-D0CFF913F400}"/>
+                <a16:creationId xmlns:a16="http://schemas.microsoft.com/office/drawing/2014/main" id="{FC9BBD27-5CA5-4E0E-B934-551E6F7B5E29}"/>
               </a:ext>
             </a:extLst>
           </p:cNvPr>
@@ -10120,7 +10320,7 @@
           <p:cNvPr id="3" name="">
             <a:extLst xmlns:a="http://schemas.openxmlformats.org/drawingml/2006/main">
               <a:ext uri="{FF2B5EF4-FFF2-40B4-BE49-F238E27FC236}">
-                <a16:creationId xmlns:a16="http://schemas.microsoft.com/office/drawing/2014/main" id="{6F15813C-117E-45FF-97E9-0440599E00E5}"/>
+                <a16:creationId xmlns:a16="http://schemas.microsoft.com/office/drawing/2014/main" id="{475DB66D-11AD-4355-B526-F4C885F36B2B}"/>
               </a:ext>
             </a:extLst>
           </p:cNvPr>
@@ -10152,7 +10352,7 @@
           <p:cNvPr id="4" name="">
             <a:extLst xmlns:a="http://schemas.openxmlformats.org/drawingml/2006/main">
               <a:ext uri="{FF2B5EF4-FFF2-40B4-BE49-F238E27FC236}">
-                <a16:creationId xmlns:a16="http://schemas.microsoft.com/office/drawing/2014/main" id="{94A9F1F5-605A-4D06-9C69-7491D066F49B}"/>
+                <a16:creationId xmlns:a16="http://schemas.microsoft.com/office/drawing/2014/main" id="{4C4E95E6-30C8-4D9D-94B6-D58EF816ECCD}"/>
               </a:ext>
             </a:extLst>
           </p:cNvPr>
@@ -10209,7 +10409,7 @@
           <p:cNvPr id="5" name="">
             <a:extLst xmlns:a="http://schemas.openxmlformats.org/drawingml/2006/main">
               <a:ext uri="{FF2B5EF4-FFF2-40B4-BE49-F238E27FC236}">
-                <a16:creationId xmlns:a16="http://schemas.microsoft.com/office/drawing/2014/main" id="{D0162A6C-75BC-467A-9732-9DA1E7D3E9F8}"/>
+                <a16:creationId xmlns:a16="http://schemas.microsoft.com/office/drawing/2014/main" id="{B186136F-F641-42CB-A2A8-3067B1B972D0}"/>
               </a:ext>
             </a:extLst>
           </p:cNvPr>
@@ -10266,7 +10466,7 @@
           <p:cNvPr id="6" name="">
             <a:extLst xmlns:a="http://schemas.openxmlformats.org/drawingml/2006/main">
               <a:ext uri="{FF2B5EF4-FFF2-40B4-BE49-F238E27FC236}">
-                <a16:creationId xmlns:a16="http://schemas.microsoft.com/office/drawing/2014/main" id="{7335261F-2CF7-4EC6-83FB-6FAC4FA11EB3}"/>
+                <a16:creationId xmlns:a16="http://schemas.microsoft.com/office/drawing/2014/main" id="{222F1079-1A48-4DBC-B043-4A05BF4323B4}"/>
               </a:ext>
             </a:extLst>
           </p:cNvPr>
@@ -10323,7 +10523,7 @@
           <p:cNvPr id="7" name="">
             <a:extLst xmlns:a="http://schemas.openxmlformats.org/drawingml/2006/main">
               <a:ext uri="{FF2B5EF4-FFF2-40B4-BE49-F238E27FC236}">
-                <a16:creationId xmlns:a16="http://schemas.microsoft.com/office/drawing/2014/main" id="{E22557D6-3821-4577-9355-B1748D5F9F14}"/>
+                <a16:creationId xmlns:a16="http://schemas.microsoft.com/office/drawing/2014/main" id="{4276359D-02A7-4372-A58D-BCC91F8A5C68}"/>
               </a:ext>
             </a:extLst>
           </p:cNvPr>
@@ -10355,7 +10555,7 @@
           <p:cNvPr id="8" name="">
             <a:extLst xmlns:a="http://schemas.openxmlformats.org/drawingml/2006/main">
               <a:ext uri="{FF2B5EF4-FFF2-40B4-BE49-F238E27FC236}">
-                <a16:creationId xmlns:a16="http://schemas.microsoft.com/office/drawing/2014/main" id="{C187CB51-32F7-4F90-AAC1-99D2D5949D08}"/>
+                <a16:creationId xmlns:a16="http://schemas.microsoft.com/office/drawing/2014/main" id="{EBA8A036-55F8-4395-AEEB-C011F76ED329}"/>
               </a:ext>
             </a:extLst>
           </p:cNvPr>
@@ -10412,7 +10612,7 @@
           <p:cNvPr id="9" name="">
             <a:extLst xmlns:a="http://schemas.openxmlformats.org/drawingml/2006/main">
               <a:ext uri="{FF2B5EF4-FFF2-40B4-BE49-F238E27FC236}">
-                <a16:creationId xmlns:a16="http://schemas.microsoft.com/office/drawing/2014/main" id="{C7ABF16F-89E8-47FC-A2F1-5CD42CCCF3AF}"/>
+                <a16:creationId xmlns:a16="http://schemas.microsoft.com/office/drawing/2014/main" id="{F6257F73-A5A4-40AB-B0E7-8D2062C46D49}"/>
               </a:ext>
             </a:extLst>
           </p:cNvPr>
@@ -10469,7 +10669,7 @@
           <p:cNvPr id="10" name="">
             <a:extLst xmlns:a="http://schemas.openxmlformats.org/drawingml/2006/main">
               <a:ext uri="{FF2B5EF4-FFF2-40B4-BE49-F238E27FC236}">
-                <a16:creationId xmlns:a16="http://schemas.microsoft.com/office/drawing/2014/main" id="{8108587F-302A-4EA9-A9C5-B0577B4FB0FD}"/>
+                <a16:creationId xmlns:a16="http://schemas.microsoft.com/office/drawing/2014/main" id="{8DFE776F-2DF5-4476-9CE5-7BF761CBBF08}"/>
               </a:ext>
             </a:extLst>
           </p:cNvPr>
@@ -10526,7 +10726,7 @@
           <p:cNvPr id="11" name="">
             <a:extLst xmlns:a="http://schemas.openxmlformats.org/drawingml/2006/main">
               <a:ext uri="{FF2B5EF4-FFF2-40B4-BE49-F238E27FC236}">
-                <a16:creationId xmlns:a16="http://schemas.microsoft.com/office/drawing/2014/main" id="{18DF7610-F3C4-4117-9ABE-AF432EBD8CC6}"/>
+                <a16:creationId xmlns:a16="http://schemas.microsoft.com/office/drawing/2014/main" id="{7EE38B96-A776-4B07-BDE9-FA512EE2AB73}"/>
               </a:ext>
             </a:extLst>
           </p:cNvPr>
@@ -10583,7 +10783,7 @@
           <p:cNvPr id="12" name="">
             <a:extLst xmlns:a="http://schemas.openxmlformats.org/drawingml/2006/main">
               <a:ext uri="{FF2B5EF4-FFF2-40B4-BE49-F238E27FC236}">
-                <a16:creationId xmlns:a16="http://schemas.microsoft.com/office/drawing/2014/main" id="{9F3CEE93-6DC6-445E-8E65-E4EE30B94F05}"/>
+                <a16:creationId xmlns:a16="http://schemas.microsoft.com/office/drawing/2014/main" id="{3ED3EF0B-4CA1-4E71-BE45-4FAE195F69B1}"/>
               </a:ext>
             </a:extLst>
           </p:cNvPr>
@@ -10640,7 +10840,7 @@
           <p:cNvPr id="13" name="">
             <a:extLst xmlns:a="http://schemas.openxmlformats.org/drawingml/2006/main">
               <a:ext uri="{FF2B5EF4-FFF2-40B4-BE49-F238E27FC236}">
-                <a16:creationId xmlns:a16="http://schemas.microsoft.com/office/drawing/2014/main" id="{6008400E-23B0-4CB0-BF75-BEB550877E5A}"/>
+                <a16:creationId xmlns:a16="http://schemas.microsoft.com/office/drawing/2014/main" id="{AB192D0F-B88A-487E-BE56-C00CF9B87F97}"/>
               </a:ext>
             </a:extLst>
           </p:cNvPr>
@@ -10697,7 +10897,7 @@
           <p:cNvPr id="14" name="">
             <a:extLst xmlns:a="http://schemas.openxmlformats.org/drawingml/2006/main">
               <a:ext uri="{FF2B5EF4-FFF2-40B4-BE49-F238E27FC236}">
-                <a16:creationId xmlns:a16="http://schemas.microsoft.com/office/drawing/2014/main" id="{559FE6CF-DB2E-410A-ACB7-7BEA69D7B711}"/>
+                <a16:creationId xmlns:a16="http://schemas.microsoft.com/office/drawing/2014/main" id="{6C527BF6-570D-4358-9786-046B79ED17EF}"/>
               </a:ext>
             </a:extLst>
           </p:cNvPr>
@@ -10754,7 +10954,7 @@
           <p:cNvPr id="15" name="">
             <a:extLst xmlns:a="http://schemas.openxmlformats.org/drawingml/2006/main">
               <a:ext uri="{FF2B5EF4-FFF2-40B4-BE49-F238E27FC236}">
-                <a16:creationId xmlns:a16="http://schemas.microsoft.com/office/drawing/2014/main" id="{72452FEA-AD1A-4540-8763-35C256FA0030}"/>
+                <a16:creationId xmlns:a16="http://schemas.microsoft.com/office/drawing/2014/main" id="{CC0946CF-3F2D-4FDE-8D59-EBBFA3238B7E}"/>
               </a:ext>
             </a:extLst>
           </p:cNvPr>
@@ -10809,7 +11009,7 @@
     </p:spTree>
     <p:extLst>
       <p:ext uri="{BB962C8B-B14F-4D97-AF65-F5344CB8AC3E}">
-        <p14:creationId xmlns:p14="http://schemas.microsoft.com/office/powerpoint/2010/main" val="987419435"/>
+        <p14:creationId xmlns:p14="http://schemas.microsoft.com/office/powerpoint/2010/main" val="1861151266"/>
       </p:ext>
     </p:extLst>
   </p:cSld>
@@ -10964,7 +11164,7 @@
           <p:cNvPr id="16" name="">
             <a:extLst xmlns:a="http://schemas.openxmlformats.org/drawingml/2006/main">
               <a:ext uri="{FF2B5EF4-FFF2-40B4-BE49-F238E27FC236}">
-                <a16:creationId xmlns:a16="http://schemas.microsoft.com/office/drawing/2014/main" id="{06FD6AAF-6368-4231-8B96-2B2AC4B8CB3D}"/>
+                <a16:creationId xmlns:a16="http://schemas.microsoft.com/office/drawing/2014/main" id="{E8A2D74A-B95D-41D3-9A80-88A0D14C3709}"/>
               </a:ext>
             </a:extLst>
           </p:cNvPr>
@@ -10996,7 +11196,7 @@
           <p:cNvPr id="2" name="">
             <a:extLst xmlns:a="http://schemas.openxmlformats.org/drawingml/2006/main">
               <a:ext uri="{FF2B5EF4-FFF2-40B4-BE49-F238E27FC236}">
-                <a16:creationId xmlns:a16="http://schemas.microsoft.com/office/drawing/2014/main" id="{1B3758B5-9274-405D-8C1D-40A2D4F11C08}"/>
+                <a16:creationId xmlns:a16="http://schemas.microsoft.com/office/drawing/2014/main" id="{A98C7D78-9E69-4ABA-B9FE-D574BFB2405F}"/>
               </a:ext>
             </a:extLst>
           </p:cNvPr>
@@ -11053,7 +11253,7 @@
           <p:cNvPr id="3" name="">
             <a:extLst xmlns:a="http://schemas.openxmlformats.org/drawingml/2006/main">
               <a:ext uri="{FF2B5EF4-FFF2-40B4-BE49-F238E27FC236}">
-                <a16:creationId xmlns:a16="http://schemas.microsoft.com/office/drawing/2014/main" id="{A669F222-D593-4312-A80C-90A3366B9F07}"/>
+                <a16:creationId xmlns:a16="http://schemas.microsoft.com/office/drawing/2014/main" id="{4F13FF64-543A-4CF3-B9FA-253888ED3389}"/>
               </a:ext>
             </a:extLst>
           </p:cNvPr>
@@ -11085,7 +11285,7 @@
           <p:cNvPr id="4" name="">
             <a:extLst xmlns:a="http://schemas.openxmlformats.org/drawingml/2006/main">
               <a:ext uri="{FF2B5EF4-FFF2-40B4-BE49-F238E27FC236}">
-                <a16:creationId xmlns:a16="http://schemas.microsoft.com/office/drawing/2014/main" id="{E26810FD-3719-4924-A812-35FF935DD28F}"/>
+                <a16:creationId xmlns:a16="http://schemas.microsoft.com/office/drawing/2014/main" id="{DD02A480-5207-4652-A37C-40F1035138CB}"/>
               </a:ext>
             </a:extLst>
           </p:cNvPr>
@@ -11142,7 +11342,7 @@
           <p:cNvPr id="5" name="">
             <a:extLst xmlns:a="http://schemas.openxmlformats.org/drawingml/2006/main">
               <a:ext uri="{FF2B5EF4-FFF2-40B4-BE49-F238E27FC236}">
-                <a16:creationId xmlns:a16="http://schemas.microsoft.com/office/drawing/2014/main" id="{B0B25BC3-048C-480E-9146-BBB60EB209B0}"/>
+                <a16:creationId xmlns:a16="http://schemas.microsoft.com/office/drawing/2014/main" id="{88DC656C-43FC-483B-82DB-55BDB8E9D280}"/>
               </a:ext>
             </a:extLst>
           </p:cNvPr>
@@ -11199,7 +11399,7 @@
           <p:cNvPr id="6" name="">
             <a:extLst xmlns:a="http://schemas.openxmlformats.org/drawingml/2006/main">
               <a:ext uri="{FF2B5EF4-FFF2-40B4-BE49-F238E27FC236}">
-                <a16:creationId xmlns:a16="http://schemas.microsoft.com/office/drawing/2014/main" id="{91280482-88BF-41C1-84E4-65054F19D13E}"/>
+                <a16:creationId xmlns:a16="http://schemas.microsoft.com/office/drawing/2014/main" id="{F72E88DF-02E5-4C31-B6FE-62120F7D4102}"/>
               </a:ext>
             </a:extLst>
           </p:cNvPr>
@@ -11256,7 +11456,7 @@
           <p:cNvPr id="7" name="">
             <a:extLst xmlns:a="http://schemas.openxmlformats.org/drawingml/2006/main">
               <a:ext uri="{FF2B5EF4-FFF2-40B4-BE49-F238E27FC236}">
-                <a16:creationId xmlns:a16="http://schemas.microsoft.com/office/drawing/2014/main" id="{C568EE79-881A-45A2-A94C-A753E8C37451}"/>
+                <a16:creationId xmlns:a16="http://schemas.microsoft.com/office/drawing/2014/main" id="{337EA456-6D5E-4787-AA73-39C170DE9B3F}"/>
               </a:ext>
             </a:extLst>
           </p:cNvPr>
@@ -11288,7 +11488,7 @@
           <p:cNvPr id="8" name="">
             <a:extLst xmlns:a="http://schemas.openxmlformats.org/drawingml/2006/main">
               <a:ext uri="{FF2B5EF4-FFF2-40B4-BE49-F238E27FC236}">
-                <a16:creationId xmlns:a16="http://schemas.microsoft.com/office/drawing/2014/main" id="{57EA0097-550B-4E60-AEED-203C796303CD}"/>
+                <a16:creationId xmlns:a16="http://schemas.microsoft.com/office/drawing/2014/main" id="{E0CFCADC-433D-4ABB-BB92-6A551081CC82}"/>
               </a:ext>
             </a:extLst>
           </p:cNvPr>
@@ -11345,7 +11545,7 @@
           <p:cNvPr id="9" name="">
             <a:extLst xmlns:a="http://schemas.openxmlformats.org/drawingml/2006/main">
               <a:ext uri="{FF2B5EF4-FFF2-40B4-BE49-F238E27FC236}">
-                <a16:creationId xmlns:a16="http://schemas.microsoft.com/office/drawing/2014/main" id="{05CAA740-0F17-4202-A3F7-54E397C2A662}"/>
+                <a16:creationId xmlns:a16="http://schemas.microsoft.com/office/drawing/2014/main" id="{DB7CE852-0AF2-46EE-99D4-B2663C494EFF}"/>
               </a:ext>
             </a:extLst>
           </p:cNvPr>
@@ -11406,7 +11606,7 @@
           <p:nvPr/>
         </p:nvPicPr>
         <p:blipFill>
-          <a:blip xmlns:r="http://schemas.openxmlformats.org/officeDocument/2006/relationships" xmlns:a="http://schemas.openxmlformats.org/drawingml/2006/main" r:embed="R8e5d969be6ba4ec7"/>
+          <a:blip xmlns:r="http://schemas.openxmlformats.org/officeDocument/2006/relationships" xmlns:a="http://schemas.openxmlformats.org/drawingml/2006/main" r:embed="Raff88b8329dc4cf5"/>
           <a:stretch xmlns:a="http://schemas.openxmlformats.org/drawingml/2006/main"/>
         </p:blipFill>
         <p:spPr>
@@ -11424,7 +11624,7 @@
           <p:cNvPr id="11" name="">
             <a:extLst xmlns:a="http://schemas.openxmlformats.org/drawingml/2006/main">
               <a:ext uri="{FF2B5EF4-FFF2-40B4-BE49-F238E27FC236}">
-                <a16:creationId xmlns:a16="http://schemas.microsoft.com/office/drawing/2014/main" id="{7D444F8A-9F37-4136-A21A-21A3C2B01DE1}"/>
+                <a16:creationId xmlns:a16="http://schemas.microsoft.com/office/drawing/2014/main" id="{09309AB7-C931-4483-A6CA-A60C8E815D20}"/>
               </a:ext>
             </a:extLst>
           </p:cNvPr>
@@ -11481,7 +11681,7 @@
           <p:cNvPr id="12" name="">
             <a:extLst xmlns:a="http://schemas.openxmlformats.org/drawingml/2006/main">
               <a:ext uri="{FF2B5EF4-FFF2-40B4-BE49-F238E27FC236}">
-                <a16:creationId xmlns:a16="http://schemas.microsoft.com/office/drawing/2014/main" id="{85BBD909-727A-49A2-91C0-B334A93D87C1}"/>
+                <a16:creationId xmlns:a16="http://schemas.microsoft.com/office/drawing/2014/main" id="{F129472F-AE05-4E9C-9DAF-94655EF3FE56}"/>
               </a:ext>
             </a:extLst>
           </p:cNvPr>
@@ -11538,7 +11738,7 @@
           <p:cNvPr id="13" name="">
             <a:extLst xmlns:a="http://schemas.openxmlformats.org/drawingml/2006/main">
               <a:ext uri="{FF2B5EF4-FFF2-40B4-BE49-F238E27FC236}">
-                <a16:creationId xmlns:a16="http://schemas.microsoft.com/office/drawing/2014/main" id="{BC8B9A88-735A-48B1-9177-67A13B986257}"/>
+                <a16:creationId xmlns:a16="http://schemas.microsoft.com/office/drawing/2014/main" id="{5423D3AE-410E-4166-BBFC-87096939F9D2}"/>
               </a:ext>
             </a:extLst>
           </p:cNvPr>
@@ -11570,7 +11770,7 @@
           <p:cNvPr id="14" name="">
             <a:extLst xmlns:a="http://schemas.openxmlformats.org/drawingml/2006/main">
               <a:ext uri="{FF2B5EF4-FFF2-40B4-BE49-F238E27FC236}">
-                <a16:creationId xmlns:a16="http://schemas.microsoft.com/office/drawing/2014/main" id="{C76AEDD0-ABC7-41C5-A805-92A3D841AFAF}"/>
+                <a16:creationId xmlns:a16="http://schemas.microsoft.com/office/drawing/2014/main" id="{E675654F-2F4E-4794-9E49-6C5552CE1EA1}"/>
               </a:ext>
             </a:extLst>
           </p:cNvPr>
@@ -11627,7 +11827,7 @@
           <p:cNvPr id="15" name="">
             <a:extLst xmlns:a="http://schemas.openxmlformats.org/drawingml/2006/main">
               <a:ext uri="{FF2B5EF4-FFF2-40B4-BE49-F238E27FC236}">
-                <a16:creationId xmlns:a16="http://schemas.microsoft.com/office/drawing/2014/main" id="{2EB99879-F346-4E16-B512-CBB1E109BD64}"/>
+                <a16:creationId xmlns:a16="http://schemas.microsoft.com/office/drawing/2014/main" id="{3792FEAC-3F17-4EBD-922E-161AC7A34BEF}"/>
               </a:ext>
             </a:extLst>
           </p:cNvPr>
@@ -11682,7 +11882,7 @@
     </p:spTree>
     <p:extLst>
       <p:ext uri="{BB962C8B-B14F-4D97-AF65-F5344CB8AC3E}">
-        <p14:creationId xmlns:p14="http://schemas.microsoft.com/office/powerpoint/2010/main" val="484872397"/>
+        <p14:creationId xmlns:p14="http://schemas.microsoft.com/office/powerpoint/2010/main" val="1618091539"/>
       </p:ext>
     </p:extLst>
   </p:cSld>
@@ -11837,7 +12037,7 @@
           <p:cNvPr id="23" name="">
             <a:extLst xmlns:a="http://schemas.openxmlformats.org/drawingml/2006/main">
               <a:ext uri="{FF2B5EF4-FFF2-40B4-BE49-F238E27FC236}">
-                <a16:creationId xmlns:a16="http://schemas.microsoft.com/office/drawing/2014/main" id="{3C9F745B-E140-4FD1-BB80-B1AEF8432E4D}"/>
+                <a16:creationId xmlns:a16="http://schemas.microsoft.com/office/drawing/2014/main" id="{3C32DDF7-60E3-4AFC-977D-8052F6283056}"/>
               </a:ext>
             </a:extLst>
           </p:cNvPr>
@@ -11869,7 +12069,7 @@
           <p:cNvPr id="2" name="">
             <a:extLst xmlns:a="http://schemas.openxmlformats.org/drawingml/2006/main">
               <a:ext uri="{FF2B5EF4-FFF2-40B4-BE49-F238E27FC236}">
-                <a16:creationId xmlns:a16="http://schemas.microsoft.com/office/drawing/2014/main" id="{661CC22E-4DBC-40D8-9665-1DF71A387086}"/>
+                <a16:creationId xmlns:a16="http://schemas.microsoft.com/office/drawing/2014/main" id="{59725F26-1361-449E-AB50-44F652F9AFA6}"/>
               </a:ext>
             </a:extLst>
           </p:cNvPr>
@@ -11926,7 +12126,7 @@
           <p:cNvPr id="3" name="">
             <a:extLst xmlns:a="http://schemas.openxmlformats.org/drawingml/2006/main">
               <a:ext uri="{FF2B5EF4-FFF2-40B4-BE49-F238E27FC236}">
-                <a16:creationId xmlns:a16="http://schemas.microsoft.com/office/drawing/2014/main" id="{00182F20-2F4E-4528-A72C-3FEED9B20AFD}"/>
+                <a16:creationId xmlns:a16="http://schemas.microsoft.com/office/drawing/2014/main" id="{7B726914-6D88-4AD0-B1A1-ACCD5F7FF359}"/>
               </a:ext>
             </a:extLst>
           </p:cNvPr>
@@ -11958,7 +12158,7 @@
           <p:cNvPr id="4" name="">
             <a:extLst xmlns:a="http://schemas.openxmlformats.org/drawingml/2006/main">
               <a:ext uri="{FF2B5EF4-FFF2-40B4-BE49-F238E27FC236}">
-                <a16:creationId xmlns:a16="http://schemas.microsoft.com/office/drawing/2014/main" id="{42CEC95D-5B79-4F60-82E2-C5E139014658}"/>
+                <a16:creationId xmlns:a16="http://schemas.microsoft.com/office/drawing/2014/main" id="{87305100-F992-4B0C-BCF5-25386F36FA49}"/>
               </a:ext>
             </a:extLst>
           </p:cNvPr>
@@ -12015,7 +12215,7 @@
           <p:cNvPr id="5" name="">
             <a:extLst xmlns:a="http://schemas.openxmlformats.org/drawingml/2006/main">
               <a:ext uri="{FF2B5EF4-FFF2-40B4-BE49-F238E27FC236}">
-                <a16:creationId xmlns:a16="http://schemas.microsoft.com/office/drawing/2014/main" id="{3964869B-D096-4131-B6DE-F52A811C92C4}"/>
+                <a16:creationId xmlns:a16="http://schemas.microsoft.com/office/drawing/2014/main" id="{522E2DC3-E2D0-4BA6-8566-F15C2033A7CD}"/>
               </a:ext>
             </a:extLst>
           </p:cNvPr>
@@ -12072,7 +12272,7 @@
           <p:cNvPr id="6" name="">
             <a:extLst xmlns:a="http://schemas.openxmlformats.org/drawingml/2006/main">
               <a:ext uri="{FF2B5EF4-FFF2-40B4-BE49-F238E27FC236}">
-                <a16:creationId xmlns:a16="http://schemas.microsoft.com/office/drawing/2014/main" id="{276AE807-BDD0-4F98-886E-75CDEE520F55}"/>
+                <a16:creationId xmlns:a16="http://schemas.microsoft.com/office/drawing/2014/main" id="{E675396E-F1FD-4AE3-A233-9511982DD4C1}"/>
               </a:ext>
             </a:extLst>
           </p:cNvPr>
@@ -12129,7 +12329,7 @@
           <p:cNvPr id="7" name="">
             <a:extLst xmlns:a="http://schemas.openxmlformats.org/drawingml/2006/main">
               <a:ext uri="{FF2B5EF4-FFF2-40B4-BE49-F238E27FC236}">
-                <a16:creationId xmlns:a16="http://schemas.microsoft.com/office/drawing/2014/main" id="{1542A981-FD72-4830-A9A1-2B55D6848E91}"/>
+                <a16:creationId xmlns:a16="http://schemas.microsoft.com/office/drawing/2014/main" id="{D99E3113-EA95-45E9-B744-6138F35F1E91}"/>
               </a:ext>
             </a:extLst>
           </p:cNvPr>
@@ -12161,7 +12361,7 @@
           <p:cNvPr id="8" name="">
             <a:extLst xmlns:a="http://schemas.openxmlformats.org/drawingml/2006/main">
               <a:ext uri="{FF2B5EF4-FFF2-40B4-BE49-F238E27FC236}">
-                <a16:creationId xmlns:a16="http://schemas.microsoft.com/office/drawing/2014/main" id="{02E038E8-2B17-47B3-B680-4C4AE8177611}"/>
+                <a16:creationId xmlns:a16="http://schemas.microsoft.com/office/drawing/2014/main" id="{660621EC-A661-4DD7-80E6-48845CBA19AE}"/>
               </a:ext>
             </a:extLst>
           </p:cNvPr>
@@ -12218,7 +12418,7 @@
           <p:cNvPr id="9" name="">
             <a:extLst xmlns:a="http://schemas.openxmlformats.org/drawingml/2006/main">
               <a:ext uri="{FF2B5EF4-FFF2-40B4-BE49-F238E27FC236}">
-                <a16:creationId xmlns:a16="http://schemas.microsoft.com/office/drawing/2014/main" id="{2DABFA9F-394B-4D4A-A943-3C4A8B207E8B}"/>
+                <a16:creationId xmlns:a16="http://schemas.microsoft.com/office/drawing/2014/main" id="{913C589F-2A8B-4555-A849-A411A451D3DE}"/>
               </a:ext>
             </a:extLst>
           </p:cNvPr>
@@ -12275,7 +12475,7 @@
           <p:cNvPr id="10" name="">
             <a:extLst xmlns:a="http://schemas.openxmlformats.org/drawingml/2006/main">
               <a:ext uri="{FF2B5EF4-FFF2-40B4-BE49-F238E27FC236}">
-                <a16:creationId xmlns:a16="http://schemas.microsoft.com/office/drawing/2014/main" id="{60B9B913-B0A0-4140-AB4A-81F9DD95EDCC}"/>
+                <a16:creationId xmlns:a16="http://schemas.microsoft.com/office/drawing/2014/main" id="{E4F1CA29-65B8-46BB-AC82-B022E0985E74}"/>
               </a:ext>
             </a:extLst>
           </p:cNvPr>
@@ -12309,7 +12509,7 @@
           <p:cNvPr id="11" name="">
             <a:extLst xmlns:a="http://schemas.openxmlformats.org/drawingml/2006/main">
               <a:ext uri="{FF2B5EF4-FFF2-40B4-BE49-F238E27FC236}">
-                <a16:creationId xmlns:a16="http://schemas.microsoft.com/office/drawing/2014/main" id="{027DE875-0AEF-4BEC-9C19-45B17B9D4380}"/>
+                <a16:creationId xmlns:a16="http://schemas.microsoft.com/office/drawing/2014/main" id="{ED152391-186F-47FE-B2D3-47783534BF99}"/>
               </a:ext>
             </a:extLst>
           </p:cNvPr>
@@ -12341,7 +12541,7 @@
           <p:cNvPr id="12" name="">
             <a:extLst xmlns:a="http://schemas.openxmlformats.org/drawingml/2006/main">
               <a:ext uri="{FF2B5EF4-FFF2-40B4-BE49-F238E27FC236}">
-                <a16:creationId xmlns:a16="http://schemas.microsoft.com/office/drawing/2014/main" id="{2C324697-3C87-4644-AD8B-9C6245B495A1}"/>
+                <a16:creationId xmlns:a16="http://schemas.microsoft.com/office/drawing/2014/main" id="{71EBFE2B-690F-44AF-A932-5944BD600BE1}"/>
               </a:ext>
             </a:extLst>
           </p:cNvPr>
@@ -12398,7 +12598,7 @@
           <p:cNvPr id="13" name="">
             <a:extLst xmlns:a="http://schemas.openxmlformats.org/drawingml/2006/main">
               <a:ext uri="{FF2B5EF4-FFF2-40B4-BE49-F238E27FC236}">
-                <a16:creationId xmlns:a16="http://schemas.microsoft.com/office/drawing/2014/main" id="{6EC9B8D1-5B15-4E03-8495-7704AFF21777}"/>
+                <a16:creationId xmlns:a16="http://schemas.microsoft.com/office/drawing/2014/main" id="{571BE009-FA0D-4336-A141-CCFE6D9A51BC}"/>
               </a:ext>
             </a:extLst>
           </p:cNvPr>
@@ -12455,7 +12655,7 @@
           <p:cNvPr id="14" name="">
             <a:extLst xmlns:a="http://schemas.openxmlformats.org/drawingml/2006/main">
               <a:ext uri="{FF2B5EF4-FFF2-40B4-BE49-F238E27FC236}">
-                <a16:creationId xmlns:a16="http://schemas.microsoft.com/office/drawing/2014/main" id="{0927CBDE-3253-4765-80AB-EC9FEDD681F2}"/>
+                <a16:creationId xmlns:a16="http://schemas.microsoft.com/office/drawing/2014/main" id="{B334A06C-B67F-485D-AB72-04B2E6545FAD}"/>
               </a:ext>
             </a:extLst>
           </p:cNvPr>
@@ -12489,7 +12689,7 @@
           <p:cNvPr id="15" name="">
             <a:extLst xmlns:a="http://schemas.openxmlformats.org/drawingml/2006/main">
               <a:ext uri="{FF2B5EF4-FFF2-40B4-BE49-F238E27FC236}">
-                <a16:creationId xmlns:a16="http://schemas.microsoft.com/office/drawing/2014/main" id="{B7A4A81E-A0E2-44E6-9872-14B57BCDC92C}"/>
+                <a16:creationId xmlns:a16="http://schemas.microsoft.com/office/drawing/2014/main" id="{14CC84EF-D73F-4BEA-B1E3-3043036D35C6}"/>
               </a:ext>
             </a:extLst>
           </p:cNvPr>
@@ -12521,7 +12721,7 @@
           <p:cNvPr id="16" name="">
             <a:extLst xmlns:a="http://schemas.openxmlformats.org/drawingml/2006/main">
               <a:ext uri="{FF2B5EF4-FFF2-40B4-BE49-F238E27FC236}">
-                <a16:creationId xmlns:a16="http://schemas.microsoft.com/office/drawing/2014/main" id="{94C17E8A-6002-44B6-B134-0394DB41DE71}"/>
+                <a16:creationId xmlns:a16="http://schemas.microsoft.com/office/drawing/2014/main" id="{5AC572CE-A2D2-42BD-A73D-5A863C4A30BE}"/>
               </a:ext>
             </a:extLst>
           </p:cNvPr>
@@ -12578,7 +12778,7 @@
           <p:cNvPr id="17" name="">
             <a:extLst xmlns:a="http://schemas.openxmlformats.org/drawingml/2006/main">
               <a:ext uri="{FF2B5EF4-FFF2-40B4-BE49-F238E27FC236}">
-                <a16:creationId xmlns:a16="http://schemas.microsoft.com/office/drawing/2014/main" id="{4A26299F-9713-4D6D-81C9-CD36A979AAD1}"/>
+                <a16:creationId xmlns:a16="http://schemas.microsoft.com/office/drawing/2014/main" id="{351798AB-5193-4484-AB63-568D0399073B}"/>
               </a:ext>
             </a:extLst>
           </p:cNvPr>
@@ -12635,7 +12835,7 @@
           <p:cNvPr id="18" name="">
             <a:extLst xmlns:a="http://schemas.openxmlformats.org/drawingml/2006/main">
               <a:ext uri="{FF2B5EF4-FFF2-40B4-BE49-F238E27FC236}">
-                <a16:creationId xmlns:a16="http://schemas.microsoft.com/office/drawing/2014/main" id="{E23A102B-E691-47FD-B7D5-5598A0B5130E}"/>
+                <a16:creationId xmlns:a16="http://schemas.microsoft.com/office/drawing/2014/main" id="{D3DC14B7-F437-4914-B474-AE43B4BC801C}"/>
               </a:ext>
             </a:extLst>
           </p:cNvPr>
@@ -12669,7 +12869,7 @@
           <p:cNvPr id="19" name="">
             <a:extLst xmlns:a="http://schemas.openxmlformats.org/drawingml/2006/main">
               <a:ext uri="{FF2B5EF4-FFF2-40B4-BE49-F238E27FC236}">
-                <a16:creationId xmlns:a16="http://schemas.microsoft.com/office/drawing/2014/main" id="{0BE62443-5E11-4467-B194-11A607ED8466}"/>
+                <a16:creationId xmlns:a16="http://schemas.microsoft.com/office/drawing/2014/main" id="{0DAD207F-704B-4DD0-975D-A23164987E39}"/>
               </a:ext>
             </a:extLst>
           </p:cNvPr>
@@ -12701,7 +12901,7 @@
           <p:cNvPr id="20" name="">
             <a:extLst xmlns:a="http://schemas.openxmlformats.org/drawingml/2006/main">
               <a:ext uri="{FF2B5EF4-FFF2-40B4-BE49-F238E27FC236}">
-                <a16:creationId xmlns:a16="http://schemas.microsoft.com/office/drawing/2014/main" id="{430FF911-3497-4DE4-8E0D-121806133C83}"/>
+                <a16:creationId xmlns:a16="http://schemas.microsoft.com/office/drawing/2014/main" id="{F5E63F4E-F240-4813-8B81-49509FCDA48D}"/>
               </a:ext>
             </a:extLst>
           </p:cNvPr>
@@ -12758,7 +12958,7 @@
           <p:cNvPr id="21" name="">
             <a:extLst xmlns:a="http://schemas.openxmlformats.org/drawingml/2006/main">
               <a:ext uri="{FF2B5EF4-FFF2-40B4-BE49-F238E27FC236}">
-                <a16:creationId xmlns:a16="http://schemas.microsoft.com/office/drawing/2014/main" id="{B73FAB22-C0BA-4699-BBCA-7576DBBA4133}"/>
+                <a16:creationId xmlns:a16="http://schemas.microsoft.com/office/drawing/2014/main" id="{113CA54A-A997-47E0-968D-25AE7EEF5A62}"/>
               </a:ext>
             </a:extLst>
           </p:cNvPr>
@@ -12815,7 +13015,7 @@
           <p:cNvPr id="22" name="">
             <a:extLst xmlns:a="http://schemas.openxmlformats.org/drawingml/2006/main">
               <a:ext uri="{FF2B5EF4-FFF2-40B4-BE49-F238E27FC236}">
-                <a16:creationId xmlns:a16="http://schemas.microsoft.com/office/drawing/2014/main" id="{24EC64B0-E9C8-48DF-B24C-6A4F4CF782E8}"/>
+                <a16:creationId xmlns:a16="http://schemas.microsoft.com/office/drawing/2014/main" id="{2F353AE2-6EF1-40F8-B3C4-3DB632974293}"/>
               </a:ext>
             </a:extLst>
           </p:cNvPr>
@@ -12870,7 +13070,7 @@
     </p:spTree>
     <p:extLst>
       <p:ext uri="{BB962C8B-B14F-4D97-AF65-F5344CB8AC3E}">
-        <p14:creationId xmlns:p14="http://schemas.microsoft.com/office/powerpoint/2010/main" val="1348596460"/>
+        <p14:creationId xmlns:p14="http://schemas.microsoft.com/office/powerpoint/2010/main" val="1709267926"/>
       </p:ext>
     </p:extLst>
   </p:cSld>
@@ -13071,7 +13271,7 @@
           <p:cNvPr id="22" name="">
             <a:extLst xmlns:a="http://schemas.openxmlformats.org/drawingml/2006/main">
               <a:ext uri="{FF2B5EF4-FFF2-40B4-BE49-F238E27FC236}">
-                <a16:creationId xmlns:a16="http://schemas.microsoft.com/office/drawing/2014/main" id="{3FA882B4-EB34-4BFC-BFC6-8CF609E43682}"/>
+                <a16:creationId xmlns:a16="http://schemas.microsoft.com/office/drawing/2014/main" id="{2C5522F6-F56A-4D14-B6F2-F9EC59EE55E2}"/>
               </a:ext>
             </a:extLst>
           </p:cNvPr>
@@ -13103,7 +13303,7 @@
           <p:cNvPr id="2" name="">
             <a:extLst xmlns:a="http://schemas.openxmlformats.org/drawingml/2006/main">
               <a:ext uri="{FF2B5EF4-FFF2-40B4-BE49-F238E27FC236}">
-                <a16:creationId xmlns:a16="http://schemas.microsoft.com/office/drawing/2014/main" id="{430D5436-7CF4-4692-99F0-740F246608C7}"/>
+                <a16:creationId xmlns:a16="http://schemas.microsoft.com/office/drawing/2014/main" id="{FF757E34-EB9F-431F-88D3-C668052CBE14}"/>
               </a:ext>
             </a:extLst>
           </p:cNvPr>
@@ -13160,7 +13360,7 @@
           <p:cNvPr id="3" name="">
             <a:extLst xmlns:a="http://schemas.openxmlformats.org/drawingml/2006/main">
               <a:ext uri="{FF2B5EF4-FFF2-40B4-BE49-F238E27FC236}">
-                <a16:creationId xmlns:a16="http://schemas.microsoft.com/office/drawing/2014/main" id="{A5C321C1-DFB9-4CE2-BC86-D0984BB94CC7}"/>
+                <a16:creationId xmlns:a16="http://schemas.microsoft.com/office/drawing/2014/main" id="{0A52D003-0B25-4D9F-9C32-8A0261633350}"/>
               </a:ext>
             </a:extLst>
           </p:cNvPr>
@@ -13192,7 +13392,7 @@
           <p:cNvPr id="4" name="">
             <a:extLst xmlns:a="http://schemas.openxmlformats.org/drawingml/2006/main">
               <a:ext uri="{FF2B5EF4-FFF2-40B4-BE49-F238E27FC236}">
-                <a16:creationId xmlns:a16="http://schemas.microsoft.com/office/drawing/2014/main" id="{C9602BC4-F5C0-448D-BE3D-D5BE1A6E550A}"/>
+                <a16:creationId xmlns:a16="http://schemas.microsoft.com/office/drawing/2014/main" id="{F0157ABF-4833-4F5C-87C5-9870330CDCDD}"/>
               </a:ext>
             </a:extLst>
           </p:cNvPr>
@@ -13249,7 +13449,7 @@
           <p:cNvPr id="5" name="">
             <a:extLst xmlns:a="http://schemas.openxmlformats.org/drawingml/2006/main">
               <a:ext uri="{FF2B5EF4-FFF2-40B4-BE49-F238E27FC236}">
-                <a16:creationId xmlns:a16="http://schemas.microsoft.com/office/drawing/2014/main" id="{5D6EF73C-A80C-4A2D-9C9C-A423551E41C0}"/>
+                <a16:creationId xmlns:a16="http://schemas.microsoft.com/office/drawing/2014/main" id="{0B0652C1-42D1-449E-B969-FBC5A765B3E7}"/>
               </a:ext>
             </a:extLst>
           </p:cNvPr>
@@ -13306,7 +13506,7 @@
           <p:cNvPr id="6" name="">
             <a:extLst xmlns:a="http://schemas.openxmlformats.org/drawingml/2006/main">
               <a:ext uri="{FF2B5EF4-FFF2-40B4-BE49-F238E27FC236}">
-                <a16:creationId xmlns:a16="http://schemas.microsoft.com/office/drawing/2014/main" id="{E3E5BE73-25FE-4336-8D5D-01FA8090C50B}"/>
+                <a16:creationId xmlns:a16="http://schemas.microsoft.com/office/drawing/2014/main" id="{B51CFCB0-1213-41BF-886B-2134154AA966}"/>
               </a:ext>
             </a:extLst>
           </p:cNvPr>
@@ -13363,7 +13563,7 @@
           <p:cNvPr id="7" name="">
             <a:extLst xmlns:a="http://schemas.openxmlformats.org/drawingml/2006/main">
               <a:ext uri="{FF2B5EF4-FFF2-40B4-BE49-F238E27FC236}">
-                <a16:creationId xmlns:a16="http://schemas.microsoft.com/office/drawing/2014/main" id="{6466F7E2-5679-4168-861E-CCFDD0E1E1A7}"/>
+                <a16:creationId xmlns:a16="http://schemas.microsoft.com/office/drawing/2014/main" id="{291F7842-E6EC-4247-A93A-09AC7BA50B32}"/>
               </a:ext>
             </a:extLst>
           </p:cNvPr>
@@ -13395,7 +13595,7 @@
           <p:cNvPr id="8" name="">
             <a:extLst xmlns:a="http://schemas.openxmlformats.org/drawingml/2006/main">
               <a:ext uri="{FF2B5EF4-FFF2-40B4-BE49-F238E27FC236}">
-                <a16:creationId xmlns:a16="http://schemas.microsoft.com/office/drawing/2014/main" id="{33C6B97E-E803-429A-97D2-7180C869A780}"/>
+                <a16:creationId xmlns:a16="http://schemas.microsoft.com/office/drawing/2014/main" id="{F57B6103-473B-470C-BD0D-85D92D9DDA8D}"/>
               </a:ext>
             </a:extLst>
           </p:cNvPr>
@@ -13452,7 +13652,7 @@
           <p:cNvPr id="9" name="">
             <a:extLst xmlns:a="http://schemas.openxmlformats.org/drawingml/2006/main">
               <a:ext uri="{FF2B5EF4-FFF2-40B4-BE49-F238E27FC236}">
-                <a16:creationId xmlns:a16="http://schemas.microsoft.com/office/drawing/2014/main" id="{29E57282-2C36-47D7-ACA1-F5C115CA5526}"/>
+                <a16:creationId xmlns:a16="http://schemas.microsoft.com/office/drawing/2014/main" id="{EFFE61F9-272F-427E-8E08-5110D8B394C5}"/>
               </a:ext>
             </a:extLst>
           </p:cNvPr>
@@ -13509,7 +13709,7 @@
           <p:cNvPr id="10" name="">
             <a:extLst xmlns:a="http://schemas.openxmlformats.org/drawingml/2006/main">
               <a:ext uri="{FF2B5EF4-FFF2-40B4-BE49-F238E27FC236}">
-                <a16:creationId xmlns:a16="http://schemas.microsoft.com/office/drawing/2014/main" id="{101C9BD4-EBDE-4C66-A360-984B05E39317}"/>
+                <a16:creationId xmlns:a16="http://schemas.microsoft.com/office/drawing/2014/main" id="{20161B9B-F961-4885-B6D5-D10AB206E2BD}"/>
               </a:ext>
             </a:extLst>
           </p:cNvPr>
@@ -13543,7 +13743,7 @@
           <p:cNvPr id="11" name="">
             <a:extLst xmlns:a="http://schemas.openxmlformats.org/drawingml/2006/main">
               <a:ext uri="{FF2B5EF4-FFF2-40B4-BE49-F238E27FC236}">
-                <a16:creationId xmlns:a16="http://schemas.microsoft.com/office/drawing/2014/main" id="{92499B63-0BAB-4E5F-93A3-6A9A23051627}"/>
+                <a16:creationId xmlns:a16="http://schemas.microsoft.com/office/drawing/2014/main" id="{1002F176-190A-41E7-A9E1-B678B01271C5}"/>
               </a:ext>
             </a:extLst>
           </p:cNvPr>
@@ -13575,7 +13775,7 @@
           <p:cNvPr id="12" name="">
             <a:extLst xmlns:a="http://schemas.openxmlformats.org/drawingml/2006/main">
               <a:ext uri="{FF2B5EF4-FFF2-40B4-BE49-F238E27FC236}">
-                <a16:creationId xmlns:a16="http://schemas.microsoft.com/office/drawing/2014/main" id="{5BECAF9C-9D12-4E67-ABAC-F82E2829A341}"/>
+                <a16:creationId xmlns:a16="http://schemas.microsoft.com/office/drawing/2014/main" id="{440FC0B8-045C-41D5-B3FA-5DE46FBEAF63}"/>
               </a:ext>
             </a:extLst>
           </p:cNvPr>
@@ -13632,7 +13832,7 @@
           <p:cNvPr id="13" name="">
             <a:extLst xmlns:a="http://schemas.openxmlformats.org/drawingml/2006/main">
               <a:ext uri="{FF2B5EF4-FFF2-40B4-BE49-F238E27FC236}">
-                <a16:creationId xmlns:a16="http://schemas.microsoft.com/office/drawing/2014/main" id="{E48530B3-A351-48AB-BC61-B618EFF566C8}"/>
+                <a16:creationId xmlns:a16="http://schemas.microsoft.com/office/drawing/2014/main" id="{F7409ABB-816D-48FB-9AA4-298E47408784}"/>
               </a:ext>
             </a:extLst>
           </p:cNvPr>
@@ -13689,7 +13889,7 @@
           <p:cNvPr id="14" name="">
             <a:extLst xmlns:a="http://schemas.openxmlformats.org/drawingml/2006/main">
               <a:ext uri="{FF2B5EF4-FFF2-40B4-BE49-F238E27FC236}">
-                <a16:creationId xmlns:a16="http://schemas.microsoft.com/office/drawing/2014/main" id="{BE0CB546-2578-4866-88BC-072BA0D19BDC}"/>
+                <a16:creationId xmlns:a16="http://schemas.microsoft.com/office/drawing/2014/main" id="{4A8B20D8-BD05-4A61-9CD1-2D140E65CEE5}"/>
               </a:ext>
             </a:extLst>
           </p:cNvPr>
@@ -13723,7 +13923,7 @@
           <p:cNvPr id="15" name="">
             <a:extLst xmlns:a="http://schemas.openxmlformats.org/drawingml/2006/main">
               <a:ext uri="{FF2B5EF4-FFF2-40B4-BE49-F238E27FC236}">
-                <a16:creationId xmlns:a16="http://schemas.microsoft.com/office/drawing/2014/main" id="{98DF35B0-5DAB-488D-8735-7BFB29586DE2}"/>
+                <a16:creationId xmlns:a16="http://schemas.microsoft.com/office/drawing/2014/main" id="{6F0D0A82-CFB5-41EF-AA9C-060AF9F70E65}"/>
               </a:ext>
             </a:extLst>
           </p:cNvPr>
@@ -13755,7 +13955,7 @@
           <p:cNvPr id="16" name="">
             <a:extLst xmlns:a="http://schemas.openxmlformats.org/drawingml/2006/main">
               <a:ext uri="{FF2B5EF4-FFF2-40B4-BE49-F238E27FC236}">
-                <a16:creationId xmlns:a16="http://schemas.microsoft.com/office/drawing/2014/main" id="{55E75F0D-4B38-41B5-824E-BA73337FBD28}"/>
+                <a16:creationId xmlns:a16="http://schemas.microsoft.com/office/drawing/2014/main" id="{CEBD3CCA-E79D-4B55-8707-9CAFAD62DA66}"/>
               </a:ext>
             </a:extLst>
           </p:cNvPr>
@@ -13812,7 +14012,7 @@
           <p:cNvPr id="17" name="">
             <a:extLst xmlns:a="http://schemas.openxmlformats.org/drawingml/2006/main">
               <a:ext uri="{FF2B5EF4-FFF2-40B4-BE49-F238E27FC236}">
-                <a16:creationId xmlns:a16="http://schemas.microsoft.com/office/drawing/2014/main" id="{E39FCDB8-4197-4FDA-B3BE-03C808CDA945}"/>
+                <a16:creationId xmlns:a16="http://schemas.microsoft.com/office/drawing/2014/main" id="{BD80FD18-E568-4748-AE9E-3B06BFF8FA2F}"/>
               </a:ext>
             </a:extLst>
           </p:cNvPr>
@@ -13869,7 +14069,7 @@
           <p:cNvPr id="18" name="">
             <a:extLst xmlns:a="http://schemas.openxmlformats.org/drawingml/2006/main">
               <a:ext uri="{FF2B5EF4-FFF2-40B4-BE49-F238E27FC236}">
-                <a16:creationId xmlns:a16="http://schemas.microsoft.com/office/drawing/2014/main" id="{F9F8BC0D-A9CF-4222-BD9D-2ED78ED43FFA}"/>
+                <a16:creationId xmlns:a16="http://schemas.microsoft.com/office/drawing/2014/main" id="{6FC5B510-4959-4B3F-BAE9-19003EB2BE94}"/>
               </a:ext>
             </a:extLst>
           </p:cNvPr>
@@ -13903,7 +14103,7 @@
           <p:cNvPr id="19" name="">
             <a:extLst xmlns:a="http://schemas.openxmlformats.org/drawingml/2006/main">
               <a:ext uri="{FF2B5EF4-FFF2-40B4-BE49-F238E27FC236}">
-                <a16:creationId xmlns:a16="http://schemas.microsoft.com/office/drawing/2014/main" id="{039FB1BC-2A76-434B-8156-C1E8727FD893}"/>
+                <a16:creationId xmlns:a16="http://schemas.microsoft.com/office/drawing/2014/main" id="{BAFE7975-E69B-4048-B821-B3EEB87409D5}"/>
               </a:ext>
             </a:extLst>
           </p:cNvPr>
@@ -13935,7 +14135,7 @@
           <p:cNvPr id="20" name="">
             <a:extLst xmlns:a="http://schemas.openxmlformats.org/drawingml/2006/main">
               <a:ext uri="{FF2B5EF4-FFF2-40B4-BE49-F238E27FC236}">
-                <a16:creationId xmlns:a16="http://schemas.microsoft.com/office/drawing/2014/main" id="{40174129-0B02-4397-9245-16558184595F}"/>
+                <a16:creationId xmlns:a16="http://schemas.microsoft.com/office/drawing/2014/main" id="{501040DE-9F62-470D-BBC2-13398D01547A}"/>
               </a:ext>
             </a:extLst>
           </p:cNvPr>
@@ -13992,7 +14192,7 @@
           <p:cNvPr id="21" name="">
             <a:extLst xmlns:a="http://schemas.openxmlformats.org/drawingml/2006/main">
               <a:ext uri="{FF2B5EF4-FFF2-40B4-BE49-F238E27FC236}">
-                <a16:creationId xmlns:a16="http://schemas.microsoft.com/office/drawing/2014/main" id="{53F3AFE3-AE6C-4FC2-9126-307A59DBAC1B}"/>
+                <a16:creationId xmlns:a16="http://schemas.microsoft.com/office/drawing/2014/main" id="{E2263838-D20C-4476-9611-937951D16108}"/>
               </a:ext>
             </a:extLst>
           </p:cNvPr>
@@ -14047,7 +14247,7 @@
     </p:spTree>
     <p:extLst>
       <p:ext uri="{BB962C8B-B14F-4D97-AF65-F5344CB8AC3E}">
-        <p14:creationId xmlns:p14="http://schemas.microsoft.com/office/powerpoint/2010/main" val="1378243900"/>
+        <p14:creationId xmlns:p14="http://schemas.microsoft.com/office/powerpoint/2010/main" val="473077811"/>
       </p:ext>
     </p:extLst>
   </p:cSld>
